--- a/DevOps CA-2 Notes Service.pptx
+++ b/DevOps CA-2 Notes Service.pptx
@@ -594,7 +594,7 @@
           <a:p>
             <a:r>
               <a:rPr lang="en-US" dirty="0"/>
-              <a:t>Code goes from the developer to GitHub, where Actions tests, builds and validates the deploy. Kubernetes runs three replicas behind a NodePort service. Ansible prepares a plain host independently of the cluster. Every pod exposes /metrics, which Prometheus scrapes and Grafana visualises.</a:t>
+              <a:t>A push or PR triggers GitHub Actions: lint and test in parallel, build the image once, scan it with Trivy, deploy it to a throwaway kind cluster, then publish the same image to GHCR. In Kubernetes the app runs in the notes namespace: three pods behind a NodePort service, an HPA that scales from 3 to 6, a PodDisruptionBudget that keeps at least 2 up, and settings from a ConfigMap. Ansible roles configure a plain Ubuntu VM with a virtualenv and a systemd unit. Prometheus scrapes /metrics, evaluates alert rules, and Grafana shows the provisioned dashboard.</a:t>
             </a:r>
             <a:endParaRPr lang="en-US" dirty="0"/>
           </a:p>
@@ -682,7 +682,7 @@
           <a:p>
             <a:r>
               <a:rPr lang="en-US" dirty="0"/>
-              <a:t>Walk left to right. Every push is tested, built into an image tagged with its commit and smoke-tested as a running container before the Kubernetes manifests are validated. Ansible prepares a plain host and is idempotent: the second run changed nothing. In Kubernetes, three replicas sit behind a NodePort service; a rolling update replaces pods one at a time without dropping capacity, and rollout undo reverts in one command. Prometheus scrapes every pod and Grafana shows uptime, request rate, p95 latency and error rate.</a:t>
+              <a:t>Step 1: lint and test run in parallel; the image is built once as version 1.0.run-number, smoke-tested, scanned with Trivy, deployed to a kind cluster inside the job, and only then pushed to GHCR. If the rollout is not healthy within 120 seconds the job runs rollout undo and fails. Step 2: two Ansible roles configure the host; dependencies go into a virtualenv and the app runs under systemd, and the playbook verifies health and version at the end. Step 3: a multi-stage, non-root image; Kubernetes adds autoscaling, a disruption budget, separate readiness and liveness probes, a progress deadline and a preStop delay so no requests are dropped. Step 4: Prometheus scrapes every 5 seconds, Grafana loads the dashboard from the repo, and three alert rules cover downtime, error rate and latency.</a:t>
             </a:r>
             <a:endParaRPr lang="en-US" dirty="0"/>
           </a:p>
@@ -770,7 +770,7 @@
           <a:p>
             <a:r>
               <a:rPr lang="en-US" dirty="0"/>
-              <a:t>Four problems we hit while running the steps. Each fix is visible in the repository: the pip flag in the playbook, the pull policy in the Deployment, the /version endpoint driven by APP_VERSION, and the /boom endpoint used to populate the error-rate panel.</a:t>
+              <a:t>The four problems that cost us the most time. Others we solved along the way: testing the playbook in Docker meant there was no systemd, so the role detects the service manager and starts gunicorn as a daemon instead; scripts edited on Windows failed with bad interpreter until .gitattributes forced LF line endings; and using /health for both probes sent traffic to pods that were not ready, so we added a separate /ready endpoint.</a:t>
             </a:r>
             <a:endParaRPr lang="en-US" dirty="0"/>
           </a:p>
@@ -858,7 +858,7 @@
           <a:p>
             <a:r>
               <a:rPr lang="en-US" dirty="0"/>
-              <a:t>Close on what we learned. The screenshot shows the idempotency proof: the first run changed six tasks, the second changed none. Then thank the audience and point to the repository.</a:t>
+              <a:t>Build once: rebuilding per stage means testing one image and shipping another. Idempotency: the screenshot shows the second run changed nothing. Rollback: rollout undo only helps if probes, maxUnavailable 0 and a progress deadline keep the old pods serving while the bad release stalls. Everything as code: the pipeline, server config, cluster state, dashboards and alerts are all reviewed files, and linting, image scanning and a non-root, read-only container cost almost nothing to add early. Thank the audience and point to the repository.</a:t>
             </a:r>
             <a:endParaRPr lang="en-US" dirty="0"/>
           </a:p>
@@ -2533,7 +2533,7 @@
         </p:nvSpPr>
         <p:spPr>
           <a:xfrm>
-            <a:off x="819150" y="2260468"/>
+            <a:off x="819150" y="2367161"/>
             <a:ext cx="1193800" cy="868627"/>
           </a:xfrm>
           <a:prstGeom prst="roundRect">
@@ -2560,7 +2560,7 @@
         </p:nvSpPr>
         <p:spPr>
           <a:xfrm>
-            <a:off x="889245" y="2444618"/>
+            <a:off x="889245" y="2551311"/>
             <a:ext cx="1053544" cy="274307"/>
           </a:xfrm>
           <a:prstGeom prst="rect">
@@ -2604,8 +2604,8 @@
         </p:nvSpPr>
         <p:spPr>
           <a:xfrm>
-            <a:off x="1069744" y="2731625"/>
-            <a:ext cx="692547" cy="238720"/>
+            <a:off x="1001957" y="2838318"/>
+            <a:ext cx="828119" cy="238720"/>
           </a:xfrm>
           <a:prstGeom prst="rect">
             <a:avLst/>
@@ -2634,7 +2634,7 @@
                 <a:ea typeface="Inter" pitchFamily="34" charset="-122"/>
                 <a:cs typeface="Inter" pitchFamily="34" charset="-120"/>
               </a:rPr>
-              <a:t>git push</a:t>
+              <a:t>push / PR</a:t>
             </a:r>
             <a:endParaRPr lang="en-US" sz="1200" dirty="0"/>
           </a:p>
@@ -2648,7 +2648,7 @@
         </p:nvSpPr>
         <p:spPr>
           <a:xfrm>
-            <a:off x="2146300" y="2516981"/>
+            <a:off x="2146300" y="2623675"/>
             <a:ext cx="270007" cy="381000"/>
           </a:xfrm>
           <a:prstGeom prst="rect">
@@ -2692,56 +2692,99 @@
         </p:nvSpPr>
         <p:spPr>
           <a:xfrm>
-            <a:off x="2498857" y="2260468"/>
-            <a:ext cx="1257300" cy="868627"/>
+            <a:off x="2492507" y="2334154"/>
+            <a:ext cx="5238486" cy="934641"/>
           </a:xfrm>
           <a:prstGeom prst="roundRect">
             <a:avLst>
-              <a:gd name="adj" fmla="val 12428"/>
+              <a:gd name="adj" fmla="val 13588"/>
+            </a:avLst>
+          </a:prstGeom>
+          <a:solidFill>
+            <a:srgbClr val="EAF1FB"/>
+          </a:solidFill>
+          <a:ln/>
+        </p:spPr>
+      </p:sp>
+      <p:sp>
+        <p:nvSpPr>
+          <p:cNvPr id="17" name="Text 15"/>
+          <p:cNvSpPr/>
+          <p:nvPr/>
+        </p:nvSpPr>
+        <p:spPr>
+          <a:xfrm>
+            <a:off x="2670307" y="2486554"/>
+            <a:ext cx="5029372" cy="238720"/>
+          </a:xfrm>
+          <a:prstGeom prst="rect">
+            <a:avLst/>
+          </a:prstGeom>
+          <a:noFill/>
+          <a:ln/>
+        </p:spPr>
+        <p:txBody>
+          <a:bodyPr wrap="square" lIns="0" tIns="0" rIns="0" bIns="0" rtlCol="0" anchor="t">
+            <a:normAutofit/>
+          </a:bodyPr>
+          <a:lstStyle/>
+          <a:p>
+            <a:pPr algn="l" indent="0" marL="0">
+              <a:lnSpc>
+                <a:spcPts val="1680"/>
+              </a:lnSpc>
+              <a:buNone/>
+            </a:pPr>
+            <a:r>
+              <a:rPr lang="en-US" sz="1200" b="1" spc="100" kern="0" dirty="0">
+                <a:solidFill>
+                  <a:srgbClr val="2F5C9E"/>
+                </a:solidFill>
+                <a:latin typeface="Inter" pitchFamily="34" charset="0"/>
+                <a:ea typeface="Inter" pitchFamily="34" charset="-122"/>
+                <a:cs typeface="Inter" pitchFamily="34" charset="-120"/>
+              </a:rPr>
+              <a:t>GITHUB ACTIONS → GHCR</a:t>
+            </a:r>
+            <a:endParaRPr lang="en-US" sz="1200" dirty="0"/>
+          </a:p>
+        </p:txBody>
+      </p:sp>
+      <p:sp>
+        <p:nvSpPr>
+          <p:cNvPr id="18" name="Text 16"/>
+          <p:cNvSpPr/>
+          <p:nvPr/>
+        </p:nvSpPr>
+        <p:spPr>
+          <a:xfrm>
+            <a:off x="2670307" y="2801475"/>
+            <a:ext cx="425516" cy="314920"/>
+          </a:xfrm>
+          <a:prstGeom prst="roundRect">
+            <a:avLst>
+              <a:gd name="adj" fmla="val 20164"/>
             </a:avLst>
           </a:prstGeom>
           <a:solidFill>
             <a:srgbClr val="FFFFFF"/>
           </a:solidFill>
-          <a:ln w="12700">
-            <a:solidFill>
-              <a:srgbClr val="E6DED6"/>
-            </a:solidFill>
-            <a:prstDash val="solid"/>
-          </a:ln>
-        </p:spPr>
-      </p:sp>
-      <p:sp>
-        <p:nvSpPr>
-          <p:cNvPr id="17" name="Text 15"/>
-          <p:cNvSpPr/>
-          <p:nvPr/>
-        </p:nvSpPr>
-        <p:spPr>
-          <a:xfrm>
-            <a:off x="2770399" y="2444618"/>
-            <a:ext cx="714216" cy="274307"/>
-          </a:xfrm>
-          <a:prstGeom prst="rect">
-            <a:avLst/>
-          </a:prstGeom>
-          <a:noFill/>
-          <a:ln/>
-        </p:spPr>
-        <p:txBody>
-          <a:bodyPr wrap="square" lIns="0" tIns="0" rIns="0" bIns="0" rtlCol="0" anchor="t">
+          <a:ln/>
+        </p:spPr>
+        <p:txBody>
+          <a:bodyPr wrap="none" lIns="0" tIns="0" rIns="0" bIns="0" rtlCol="0" anchor="ctr">
             <a:normAutofit/>
           </a:bodyPr>
           <a:lstStyle/>
           <a:p>
             <a:pPr algn="ctr" indent="0" marL="0">
               <a:lnSpc>
-                <a:spcPts val="1960"/>
-              </a:lnSpc>
-              <a:buNone/>
-            </a:pPr>
-            <a:r>
-              <a:rPr lang="en-US" sz="1400" b="1" dirty="0">
+                <a:spcPts val="1680"/>
+              </a:lnSpc>
+              <a:buNone/>
+            </a:pPr>
+            <a:r>
+              <a:rPr lang="en-US" sz="1200" b="1" dirty="0">
                 <a:solidFill>
                   <a:srgbClr val="2A2340"/>
                 </a:solidFill>
@@ -2749,51 +2792,7 @@
                 <a:ea typeface="Inter" pitchFamily="34" charset="-122"/>
                 <a:cs typeface="Inter" pitchFamily="34" charset="-120"/>
               </a:rPr>
-              <a:t>GitHub</a:t>
-            </a:r>
-            <a:endParaRPr lang="en-US" sz="1400" dirty="0"/>
-          </a:p>
-        </p:txBody>
-      </p:sp>
-      <p:sp>
-        <p:nvSpPr>
-          <p:cNvPr id="18" name="Text 16"/>
-          <p:cNvSpPr/>
-          <p:nvPr/>
-        </p:nvSpPr>
-        <p:spPr>
-          <a:xfrm>
-            <a:off x="2688960" y="2731625"/>
-            <a:ext cx="877094" cy="238720"/>
-          </a:xfrm>
-          <a:prstGeom prst="rect">
-            <a:avLst/>
-          </a:prstGeom>
-          <a:noFill/>
-          <a:ln/>
-        </p:spPr>
-        <p:txBody>
-          <a:bodyPr wrap="square" lIns="0" tIns="0" rIns="0" bIns="0" rtlCol="0" anchor="t">
-            <a:normAutofit/>
-          </a:bodyPr>
-          <a:lstStyle/>
-          <a:p>
-            <a:pPr algn="ctr" indent="0" marL="0">
-              <a:lnSpc>
-                <a:spcPts val="1680"/>
-              </a:lnSpc>
-              <a:buNone/>
-            </a:pPr>
-            <a:r>
-              <a:rPr lang="en-US" sz="1200" dirty="0">
-                <a:solidFill>
-                  <a:srgbClr val="6B6478"/>
-                </a:solidFill>
-                <a:latin typeface="Inter" pitchFamily="34" charset="0"/>
-                <a:ea typeface="Inter" pitchFamily="34" charset="-122"/>
-                <a:cs typeface="Inter" pitchFamily="34" charset="-120"/>
-              </a:rPr>
-              <a:t>repository</a:t>
+              <a:t>Lint</a:t>
             </a:r>
             <a:endParaRPr lang="en-US" sz="1200" dirty="0"/>
           </a:p>
@@ -2807,122 +2806,12 @@
         </p:nvSpPr>
         <p:spPr>
           <a:xfrm>
-            <a:off x="3889508" y="2516981"/>
-            <a:ext cx="270007" cy="381000"/>
-          </a:xfrm>
-          <a:prstGeom prst="rect">
-            <a:avLst/>
-          </a:prstGeom>
-          <a:noFill/>
-          <a:ln/>
-        </p:spPr>
-        <p:txBody>
-          <a:bodyPr wrap="square" lIns="0" tIns="0" rIns="0" bIns="0" rtlCol="0" anchor="t">
-            <a:normAutofit/>
-          </a:bodyPr>
-          <a:lstStyle/>
-          <a:p>
-            <a:pPr algn="l" indent="0" marL="0">
-              <a:lnSpc>
-                <a:spcPts val="2800"/>
-              </a:lnSpc>
-              <a:buNone/>
-            </a:pPr>
-            <a:r>
-              <a:rPr lang="en-US" sz="2000" dirty="0">
-                <a:solidFill>
-                  <a:srgbClr val="A47864"/>
-                </a:solidFill>
-                <a:latin typeface="Inter" pitchFamily="34" charset="0"/>
-                <a:ea typeface="Inter" pitchFamily="34" charset="-122"/>
-                <a:cs typeface="Inter" pitchFamily="34" charset="-120"/>
-              </a:rPr>
-              <a:t>→</a:t>
-            </a:r>
-            <a:endParaRPr lang="en-US" sz="2000" dirty="0"/>
-          </a:p>
-        </p:txBody>
-      </p:sp>
-      <p:sp>
-        <p:nvSpPr>
-          <p:cNvPr id="20" name="Shape 18"/>
-          <p:cNvSpPr/>
-          <p:nvPr/>
-        </p:nvSpPr>
-        <p:spPr>
-          <a:xfrm>
-            <a:off x="4235715" y="2214761"/>
-            <a:ext cx="3495278" cy="960041"/>
+            <a:off x="3146623" y="2801475"/>
+            <a:ext cx="468776" cy="314920"/>
           </a:xfrm>
           <a:prstGeom prst="roundRect">
             <a:avLst>
-              <a:gd name="adj" fmla="val 13229"/>
-            </a:avLst>
-          </a:prstGeom>
-          <a:solidFill>
-            <a:srgbClr val="EAF1FB"/>
-          </a:solidFill>
-          <a:ln/>
-        </p:spPr>
-      </p:sp>
-      <p:sp>
-        <p:nvSpPr>
-          <p:cNvPr id="21" name="Text 19"/>
-          <p:cNvSpPr/>
-          <p:nvPr/>
-        </p:nvSpPr>
-        <p:spPr>
-          <a:xfrm>
-            <a:off x="4413515" y="2367161"/>
-            <a:ext cx="3233868" cy="238720"/>
-          </a:xfrm>
-          <a:prstGeom prst="rect">
-            <a:avLst/>
-          </a:prstGeom>
-          <a:noFill/>
-          <a:ln/>
-        </p:spPr>
-        <p:txBody>
-          <a:bodyPr wrap="square" lIns="0" tIns="0" rIns="0" bIns="0" rtlCol="0" anchor="t">
-            <a:normAutofit/>
-          </a:bodyPr>
-          <a:lstStyle/>
-          <a:p>
-            <a:pPr algn="l" indent="0" marL="0">
-              <a:lnSpc>
-                <a:spcPts val="1680"/>
-              </a:lnSpc>
-              <a:buNone/>
-            </a:pPr>
-            <a:r>
-              <a:rPr lang="en-US" sz="1200" b="1" spc="100" kern="0" dirty="0">
-                <a:solidFill>
-                  <a:srgbClr val="2F5C9E"/>
-                </a:solidFill>
-                <a:latin typeface="Inter" pitchFamily="34" charset="0"/>
-                <a:ea typeface="Inter" pitchFamily="34" charset="-122"/>
-                <a:cs typeface="Inter" pitchFamily="34" charset="-120"/>
-              </a:rPr>
-              <a:t>GITHUB ACTIONS</a:t>
-            </a:r>
-            <a:endParaRPr lang="en-US" sz="1200" dirty="0"/>
-          </a:p>
-        </p:txBody>
-      </p:sp>
-      <p:sp>
-        <p:nvSpPr>
-          <p:cNvPr id="22" name="Text 20"/>
-          <p:cNvSpPr/>
-          <p:nvPr/>
-        </p:nvSpPr>
-        <p:spPr>
-          <a:xfrm>
-            <a:off x="4413515" y="2682081"/>
-            <a:ext cx="544976" cy="340320"/>
-          </a:xfrm>
-          <a:prstGeom prst="roundRect">
-            <a:avLst>
-              <a:gd name="adj" fmla="val 22391"/>
+              <a:gd name="adj" fmla="val 20164"/>
             </a:avLst>
           </a:prstGeom>
           <a:solidFill>
@@ -2959,13 +2848,13 @@
       </p:sp>
       <p:sp>
         <p:nvSpPr>
-          <p:cNvPr id="23" name="Text 21"/>
-          <p:cNvSpPr/>
-          <p:nvPr/>
-        </p:nvSpPr>
-        <p:spPr>
-          <a:xfrm>
-            <a:off x="5021990" y="2745581"/>
+          <p:cNvPr id="20" name="Text 18"/>
+          <p:cNvSpPr/>
+          <p:nvPr/>
+        </p:nvSpPr>
+        <p:spPr>
+          <a:xfrm>
+            <a:off x="3666199" y="2852275"/>
             <a:ext cx="109405" cy="238720"/>
           </a:xfrm>
           <a:prstGeom prst="rect">
@@ -3003,18 +2892,18 @@
       </p:sp>
       <p:sp>
         <p:nvSpPr>
-          <p:cNvPr id="24" name="Text 22"/>
-          <p:cNvSpPr/>
-          <p:nvPr/>
-        </p:nvSpPr>
-        <p:spPr>
-          <a:xfrm>
-            <a:off x="5144095" y="2682081"/>
-            <a:ext cx="597297" cy="340320"/>
+          <p:cNvPr id="21" name="Text 19"/>
+          <p:cNvSpPr/>
+          <p:nvPr/>
+        </p:nvSpPr>
+        <p:spPr>
+          <a:xfrm>
+            <a:off x="3775604" y="2801475"/>
+            <a:ext cx="521097" cy="314920"/>
           </a:xfrm>
           <a:prstGeom prst="roundRect">
             <a:avLst>
-              <a:gd name="adj" fmla="val 22391"/>
+              <a:gd name="adj" fmla="val 20164"/>
             </a:avLst>
           </a:prstGeom>
           <a:solidFill>
@@ -3051,13 +2940,13 @@
       </p:sp>
       <p:sp>
         <p:nvSpPr>
-          <p:cNvPr id="25" name="Text 23"/>
-          <p:cNvSpPr/>
-          <p:nvPr/>
-        </p:nvSpPr>
-        <p:spPr>
-          <a:xfrm>
-            <a:off x="5804892" y="2745581"/>
+          <p:cNvPr id="22" name="Text 20"/>
+          <p:cNvSpPr/>
+          <p:nvPr/>
+        </p:nvSpPr>
+        <p:spPr>
+          <a:xfrm>
+            <a:off x="4347501" y="2852275"/>
             <a:ext cx="109405" cy="238720"/>
           </a:xfrm>
           <a:prstGeom prst="rect">
@@ -3095,18 +2984,18 @@
       </p:sp>
       <p:sp>
         <p:nvSpPr>
-          <p:cNvPr id="26" name="Text 24"/>
-          <p:cNvSpPr/>
-          <p:nvPr/>
-        </p:nvSpPr>
-        <p:spPr>
-          <a:xfrm>
-            <a:off x="5926998" y="2682081"/>
-            <a:ext cx="743413" cy="340320"/>
+          <p:cNvPr id="23" name="Text 21"/>
+          <p:cNvSpPr/>
+          <p:nvPr/>
+        </p:nvSpPr>
+        <p:spPr>
+          <a:xfrm>
+            <a:off x="4456906" y="2801475"/>
+            <a:ext cx="522552" cy="314920"/>
           </a:xfrm>
           <a:prstGeom prst="roundRect">
             <a:avLst>
-              <a:gd name="adj" fmla="val 22391"/>
+              <a:gd name="adj" fmla="val 20164"/>
             </a:avLst>
           </a:prstGeom>
           <a:solidFill>
@@ -3135,70 +3024,254 @@
                 <a:ea typeface="Inter" pitchFamily="34" charset="-122"/>
                 <a:cs typeface="Inter" pitchFamily="34" charset="-120"/>
               </a:rPr>
-              <a:t>Deploy</a:t>
-            </a:r>
-            <a:endParaRPr lang="en-US" sz="1200" dirty="0"/>
-          </a:p>
-        </p:txBody>
-      </p:sp>
-      <p:sp>
-        <p:nvSpPr>
-          <p:cNvPr id="27" name="Text 25"/>
-          <p:cNvSpPr/>
-          <p:nvPr/>
-        </p:nvSpPr>
-        <p:spPr>
-          <a:xfrm>
-            <a:off x="7857993" y="2516981"/>
-            <a:ext cx="270007" cy="381000"/>
-          </a:xfrm>
-          <a:prstGeom prst="rect">
-            <a:avLst/>
-          </a:prstGeom>
-          <a:noFill/>
-          <a:ln/>
-        </p:spPr>
-        <p:txBody>
-          <a:bodyPr wrap="square" lIns="0" tIns="0" rIns="0" bIns="0" rtlCol="0" anchor="t">
-            <a:normAutofit/>
-          </a:bodyPr>
-          <a:lstStyle/>
-          <a:p>
-            <a:pPr algn="l" indent="0" marL="0">
-              <a:lnSpc>
-                <a:spcPts val="2800"/>
-              </a:lnSpc>
-              <a:buNone/>
-            </a:pPr>
-            <a:r>
-              <a:rPr lang="en-US" sz="2000" dirty="0">
-                <a:solidFill>
-                  <a:srgbClr val="A47864"/>
-                </a:solidFill>
-                <a:latin typeface="Inter" pitchFamily="34" charset="0"/>
-                <a:ea typeface="Inter" pitchFamily="34" charset="-122"/>
-                <a:cs typeface="Inter" pitchFamily="34" charset="-120"/>
-              </a:rPr>
-              <a:t>→</a:t>
-            </a:r>
-            <a:endParaRPr lang="en-US" sz="2000" dirty="0"/>
-          </a:p>
-        </p:txBody>
-      </p:sp>
-      <p:sp>
-        <p:nvSpPr>
-          <p:cNvPr id="28" name="Shape 26"/>
-          <p:cNvSpPr/>
-          <p:nvPr/>
-        </p:nvSpPr>
-        <p:spPr>
-          <a:xfrm>
-            <a:off x="8204200" y="2006534"/>
-            <a:ext cx="3175000" cy="1376561"/>
+              <a:t>Scan</a:t>
+            </a:r>
+            <a:endParaRPr lang="en-US" sz="1200" dirty="0"/>
+          </a:p>
+        </p:txBody>
+      </p:sp>
+      <p:sp>
+        <p:nvSpPr>
+          <p:cNvPr id="24" name="Text 22"/>
+          <p:cNvSpPr/>
+          <p:nvPr/>
+        </p:nvSpPr>
+        <p:spPr>
+          <a:xfrm>
+            <a:off x="5030258" y="2852275"/>
+            <a:ext cx="109405" cy="238720"/>
+          </a:xfrm>
+          <a:prstGeom prst="rect">
+            <a:avLst/>
+          </a:prstGeom>
+          <a:noFill/>
+          <a:ln/>
+        </p:spPr>
+        <p:txBody>
+          <a:bodyPr wrap="square" lIns="0" tIns="0" rIns="0" bIns="0" rtlCol="0" anchor="t">
+            <a:normAutofit/>
+          </a:bodyPr>
+          <a:lstStyle/>
+          <a:p>
+            <a:pPr algn="l" indent="0" marL="0">
+              <a:lnSpc>
+                <a:spcPts val="1680"/>
+              </a:lnSpc>
+              <a:buNone/>
+            </a:pPr>
+            <a:r>
+              <a:rPr lang="en-US" sz="1200" dirty="0">
+                <a:solidFill>
+                  <a:srgbClr val="2F5C9E"/>
+                </a:solidFill>
+                <a:latin typeface="Inter" pitchFamily="34" charset="0"/>
+                <a:ea typeface="Inter" pitchFamily="34" charset="-122"/>
+                <a:cs typeface="Inter" pitchFamily="34" charset="-120"/>
+              </a:rPr>
+              <a:t>›</a:t>
+            </a:r>
+            <a:endParaRPr lang="en-US" sz="1200" dirty="0"/>
+          </a:p>
+        </p:txBody>
+      </p:sp>
+      <p:sp>
+        <p:nvSpPr>
+          <p:cNvPr id="25" name="Text 23"/>
+          <p:cNvSpPr/>
+          <p:nvPr/>
+        </p:nvSpPr>
+        <p:spPr>
+          <a:xfrm>
+            <a:off x="5139664" y="2801475"/>
+            <a:ext cx="667213" cy="314920"/>
           </a:xfrm>
           <a:prstGeom prst="roundRect">
             <a:avLst>
-              <a:gd name="adj" fmla="val 9226"/>
+              <a:gd name="adj" fmla="val 20164"/>
+            </a:avLst>
+          </a:prstGeom>
+          <a:solidFill>
+            <a:srgbClr val="FFFFFF"/>
+          </a:solidFill>
+          <a:ln/>
+        </p:spPr>
+        <p:txBody>
+          <a:bodyPr wrap="none" lIns="0" tIns="0" rIns="0" bIns="0" rtlCol="0" anchor="ctr">
+            <a:normAutofit/>
+          </a:bodyPr>
+          <a:lstStyle/>
+          <a:p>
+            <a:pPr algn="ctr" indent="0" marL="0">
+              <a:lnSpc>
+                <a:spcPts val="1680"/>
+              </a:lnSpc>
+              <a:buNone/>
+            </a:pPr>
+            <a:r>
+              <a:rPr lang="en-US" sz="1200" b="1" dirty="0">
+                <a:solidFill>
+                  <a:srgbClr val="2A2340"/>
+                </a:solidFill>
+                <a:latin typeface="Inter" pitchFamily="34" charset="0"/>
+                <a:ea typeface="Inter" pitchFamily="34" charset="-122"/>
+                <a:cs typeface="Inter" pitchFamily="34" charset="-120"/>
+              </a:rPr>
+              <a:t>Deploy</a:t>
+            </a:r>
+            <a:endParaRPr lang="en-US" sz="1200" dirty="0"/>
+          </a:p>
+        </p:txBody>
+      </p:sp>
+      <p:sp>
+        <p:nvSpPr>
+          <p:cNvPr id="26" name="Text 24"/>
+          <p:cNvSpPr/>
+          <p:nvPr/>
+        </p:nvSpPr>
+        <p:spPr>
+          <a:xfrm>
+            <a:off x="5857677" y="2852275"/>
+            <a:ext cx="109405" cy="238720"/>
+          </a:xfrm>
+          <a:prstGeom prst="rect">
+            <a:avLst/>
+          </a:prstGeom>
+          <a:noFill/>
+          <a:ln/>
+        </p:spPr>
+        <p:txBody>
+          <a:bodyPr wrap="square" lIns="0" tIns="0" rIns="0" bIns="0" rtlCol="0" anchor="t">
+            <a:normAutofit/>
+          </a:bodyPr>
+          <a:lstStyle/>
+          <a:p>
+            <a:pPr algn="l" indent="0" marL="0">
+              <a:lnSpc>
+                <a:spcPts val="1680"/>
+              </a:lnSpc>
+              <a:buNone/>
+            </a:pPr>
+            <a:r>
+              <a:rPr lang="en-US" sz="1200" dirty="0">
+                <a:solidFill>
+                  <a:srgbClr val="2F5C9E"/>
+                </a:solidFill>
+                <a:latin typeface="Inter" pitchFamily="34" charset="0"/>
+                <a:ea typeface="Inter" pitchFamily="34" charset="-122"/>
+                <a:cs typeface="Inter" pitchFamily="34" charset="-120"/>
+              </a:rPr>
+              <a:t>›</a:t>
+            </a:r>
+            <a:endParaRPr lang="en-US" sz="1200" dirty="0"/>
+          </a:p>
+        </p:txBody>
+      </p:sp>
+      <p:sp>
+        <p:nvSpPr>
+          <p:cNvPr id="27" name="Text 25"/>
+          <p:cNvSpPr/>
+          <p:nvPr/>
+        </p:nvSpPr>
+        <p:spPr>
+          <a:xfrm>
+            <a:off x="5967082" y="2801475"/>
+            <a:ext cx="695920" cy="314920"/>
+          </a:xfrm>
+          <a:prstGeom prst="roundRect">
+            <a:avLst>
+              <a:gd name="adj" fmla="val 20164"/>
+            </a:avLst>
+          </a:prstGeom>
+          <a:solidFill>
+            <a:srgbClr val="FFFFFF"/>
+          </a:solidFill>
+          <a:ln/>
+        </p:spPr>
+        <p:txBody>
+          <a:bodyPr wrap="none" lIns="0" tIns="0" rIns="0" bIns="0" rtlCol="0" anchor="ctr">
+            <a:normAutofit/>
+          </a:bodyPr>
+          <a:lstStyle/>
+          <a:p>
+            <a:pPr algn="ctr" indent="0" marL="0">
+              <a:lnSpc>
+                <a:spcPts val="1680"/>
+              </a:lnSpc>
+              <a:buNone/>
+            </a:pPr>
+            <a:r>
+              <a:rPr lang="en-US" sz="1200" b="1" dirty="0">
+                <a:solidFill>
+                  <a:srgbClr val="2A2340"/>
+                </a:solidFill>
+                <a:latin typeface="Inter" pitchFamily="34" charset="0"/>
+                <a:ea typeface="Inter" pitchFamily="34" charset="-122"/>
+                <a:cs typeface="Inter" pitchFamily="34" charset="-120"/>
+              </a:rPr>
+              <a:t>Publish</a:t>
+            </a:r>
+            <a:endParaRPr lang="en-US" sz="1200" dirty="0"/>
+          </a:p>
+        </p:txBody>
+      </p:sp>
+      <p:sp>
+        <p:nvSpPr>
+          <p:cNvPr id="28" name="Text 26"/>
+          <p:cNvSpPr/>
+          <p:nvPr/>
+        </p:nvSpPr>
+        <p:spPr>
+          <a:xfrm>
+            <a:off x="7857993" y="2623675"/>
+            <a:ext cx="270007" cy="381000"/>
+          </a:xfrm>
+          <a:prstGeom prst="rect">
+            <a:avLst/>
+          </a:prstGeom>
+          <a:noFill/>
+          <a:ln/>
+        </p:spPr>
+        <p:txBody>
+          <a:bodyPr wrap="square" lIns="0" tIns="0" rIns="0" bIns="0" rtlCol="0" anchor="t">
+            <a:normAutofit/>
+          </a:bodyPr>
+          <a:lstStyle/>
+          <a:p>
+            <a:pPr algn="l" indent="0" marL="0">
+              <a:lnSpc>
+                <a:spcPts val="2800"/>
+              </a:lnSpc>
+              <a:buNone/>
+            </a:pPr>
+            <a:r>
+              <a:rPr lang="en-US" sz="2000" dirty="0">
+                <a:solidFill>
+                  <a:srgbClr val="A47864"/>
+                </a:solidFill>
+                <a:latin typeface="Inter" pitchFamily="34" charset="0"/>
+                <a:ea typeface="Inter" pitchFamily="34" charset="-122"/>
+                <a:cs typeface="Inter" pitchFamily="34" charset="-120"/>
+              </a:rPr>
+              <a:t>→</a:t>
+            </a:r>
+            <a:endParaRPr lang="en-US" sz="2000" dirty="0"/>
+          </a:p>
+        </p:txBody>
+      </p:sp>
+      <p:sp>
+        <p:nvSpPr>
+          <p:cNvPr id="29" name="Shape 27"/>
+          <p:cNvSpPr/>
+          <p:nvPr/>
+        </p:nvSpPr>
+        <p:spPr>
+          <a:xfrm>
+            <a:off x="8204200" y="2006534"/>
+            <a:ext cx="3175000" cy="1589881"/>
+          </a:xfrm>
+          <a:prstGeom prst="roundRect">
+            <a:avLst>
+              <a:gd name="adj" fmla="val 7988"/>
             </a:avLst>
           </a:prstGeom>
           <a:solidFill>
@@ -3209,7 +3282,7 @@
       </p:sp>
       <p:sp>
         <p:nvSpPr>
-          <p:cNvPr id="29" name="Text 27"/>
+          <p:cNvPr id="30" name="Text 28"/>
           <p:cNvSpPr/>
           <p:nvPr/>
         </p:nvSpPr>
@@ -3245,26 +3318,26 @@
                 <a:ea typeface="Inter" pitchFamily="34" charset="-122"/>
                 <a:cs typeface="Inter" pitchFamily="34" charset="-120"/>
               </a:rPr>
-              <a:t>KUBERNETES CLUSTER</a:t>
-            </a:r>
-            <a:endParaRPr lang="en-US" sz="1200" dirty="0"/>
-          </a:p>
-        </p:txBody>
-      </p:sp>
-      <p:sp>
-        <p:nvSpPr>
-          <p:cNvPr id="30" name="Text 28"/>
-          <p:cNvSpPr/>
-          <p:nvPr/>
-        </p:nvSpPr>
-        <p:spPr>
-          <a:xfrm>
-            <a:off x="8382000" y="2461154"/>
-            <a:ext cx="2819400" cy="340320"/>
+              <a:t>KUBERNETES · NS notes</a:t>
+            </a:r>
+            <a:endParaRPr lang="en-US" sz="1200" dirty="0"/>
+          </a:p>
+        </p:txBody>
+      </p:sp>
+      <p:sp>
+        <p:nvSpPr>
+          <p:cNvPr id="31" name="Text 29"/>
+          <p:cNvSpPr/>
+          <p:nvPr/>
+        </p:nvSpPr>
+        <p:spPr>
+          <a:xfrm>
+            <a:off x="8382000" y="2448454"/>
+            <a:ext cx="2819400" cy="314920"/>
           </a:xfrm>
           <a:prstGeom prst="roundRect">
             <a:avLst>
-              <a:gd name="adj" fmla="val 22391"/>
+              <a:gd name="adj" fmla="val 24197"/>
             </a:avLst>
           </a:prstGeom>
           <a:solidFill>
@@ -3273,7 +3346,7 @@
           <a:ln/>
         </p:spPr>
         <p:txBody>
-          <a:bodyPr wrap="square" lIns="91982" tIns="41182" rIns="14258" bIns="15782" rtlCol="0" anchor="t">
+          <a:bodyPr wrap="square" lIns="79282" tIns="28482" rIns="796" bIns="3082" rtlCol="0" anchor="t">
             <a:normAutofit/>
           </a:bodyPr>
           <a:lstStyle/>
@@ -3301,14 +3374,14 @@
       </p:sp>
       <p:sp>
         <p:nvSpPr>
-          <p:cNvPr id="31" name="Text 29"/>
-          <p:cNvSpPr/>
-          <p:nvPr/>
-        </p:nvSpPr>
-        <p:spPr>
-          <a:xfrm>
-            <a:off x="8382000" y="2890375"/>
-            <a:ext cx="897467" cy="340320"/>
+          <p:cNvPr id="32" name="Text 30"/>
+          <p:cNvSpPr/>
+          <p:nvPr/>
+        </p:nvSpPr>
+        <p:spPr>
+          <a:xfrm>
+            <a:off x="8382000" y="2839575"/>
+            <a:ext cx="897467" cy="314920"/>
           </a:xfrm>
           <a:custGeom>
             <a:avLst/>
@@ -3317,7 +3390,7 @@
             <a:cxnLst/>
             <a:rect l="l" t="t" r="r" b="b"/>
             <a:pathLst>
-              <a:path w="897467" h="340320">
+              <a:path w="897467" h="314920">
                 <a:moveTo>
                   <a:pt x="76200" y="0"/>
                 </a:moveTo>
@@ -3326,11 +3399,11 @@
                 </a:lnTo>
                 <a:arcTo hR="76200" wR="76200" stAng="16200000" swAng="5400000"/>
                 <a:lnTo>
-                  <a:pt x="897467" y="264120"/>
+                  <a:pt x="897467" y="238720"/>
                 </a:lnTo>
                 <a:arcTo hR="76200" wR="76200" stAng="0" swAng="5400000"/>
                 <a:lnTo>
-                  <a:pt x="76200" y="340320"/>
+                  <a:pt x="76200" y="314920"/>
                 </a:lnTo>
                 <a:arcTo hR="76200" wR="76200" stAng="5400000" swAng="5400000"/>
                 <a:lnTo>
@@ -3347,7 +3420,7 @@
           <a:ln/>
         </p:spPr>
         <p:txBody>
-          <a:bodyPr wrap="square" lIns="0" tIns="63500" rIns="0" bIns="38100" rtlCol="0" anchor="t">
+          <a:bodyPr wrap="square" lIns="0" tIns="50800" rIns="0" bIns="25400" rtlCol="0" anchor="t">
             <a:normAutofit/>
           </a:bodyPr>
           <a:lstStyle/>
@@ -3375,14 +3448,14 @@
       </p:sp>
       <p:sp>
         <p:nvSpPr>
-          <p:cNvPr id="32" name="Text 30"/>
-          <p:cNvSpPr/>
-          <p:nvPr/>
-        </p:nvSpPr>
-        <p:spPr>
-          <a:xfrm>
-            <a:off x="9342967" y="2890375"/>
-            <a:ext cx="897467" cy="340320"/>
+          <p:cNvPr id="33" name="Text 31"/>
+          <p:cNvSpPr/>
+          <p:nvPr/>
+        </p:nvSpPr>
+        <p:spPr>
+          <a:xfrm>
+            <a:off x="9342967" y="2839575"/>
+            <a:ext cx="897467" cy="314920"/>
           </a:xfrm>
           <a:custGeom>
             <a:avLst/>
@@ -3391,7 +3464,7 @@
             <a:cxnLst/>
             <a:rect l="l" t="t" r="r" b="b"/>
             <a:pathLst>
-              <a:path w="897467" h="340320">
+              <a:path w="897467" h="314920">
                 <a:moveTo>
                   <a:pt x="76200" y="0"/>
                 </a:moveTo>
@@ -3400,11 +3473,11 @@
                 </a:lnTo>
                 <a:arcTo hR="76200" wR="76200" stAng="16200000" swAng="5400000"/>
                 <a:lnTo>
-                  <a:pt x="897467" y="264120"/>
+                  <a:pt x="897467" y="238720"/>
                 </a:lnTo>
                 <a:arcTo hR="76200" wR="76200" stAng="0" swAng="5400000"/>
                 <a:lnTo>
-                  <a:pt x="76200" y="340320"/>
+                  <a:pt x="76200" y="314920"/>
                 </a:lnTo>
                 <a:arcTo hR="76200" wR="76200" stAng="5400000" swAng="5400000"/>
                 <a:lnTo>
@@ -3421,7 +3494,7 @@
           <a:ln/>
         </p:spPr>
         <p:txBody>
-          <a:bodyPr wrap="square" lIns="0" tIns="63500" rIns="0" bIns="38100" rtlCol="0" anchor="t">
+          <a:bodyPr wrap="square" lIns="0" tIns="50800" rIns="0" bIns="25400" rtlCol="0" anchor="t">
             <a:normAutofit/>
           </a:bodyPr>
           <a:lstStyle/>
@@ -3449,14 +3522,14 @@
       </p:sp>
       <p:sp>
         <p:nvSpPr>
-          <p:cNvPr id="33" name="Text 31"/>
-          <p:cNvSpPr/>
-          <p:nvPr/>
-        </p:nvSpPr>
-        <p:spPr>
-          <a:xfrm>
-            <a:off x="10303934" y="2890375"/>
-            <a:ext cx="897467" cy="340320"/>
+          <p:cNvPr id="34" name="Text 32"/>
+          <p:cNvSpPr/>
+          <p:nvPr/>
+        </p:nvSpPr>
+        <p:spPr>
+          <a:xfrm>
+            <a:off x="10303934" y="2839575"/>
+            <a:ext cx="897467" cy="314920"/>
           </a:xfrm>
           <a:custGeom>
             <a:avLst/>
@@ -3465,7 +3538,7 @@
             <a:cxnLst/>
             <a:rect l="l" t="t" r="r" b="b"/>
             <a:pathLst>
-              <a:path w="897467" h="340320">
+              <a:path w="897467" h="314920">
                 <a:moveTo>
                   <a:pt x="76200" y="0"/>
                 </a:moveTo>
@@ -3474,11 +3547,11 @@
                 </a:lnTo>
                 <a:arcTo hR="76200" wR="76200" stAng="16200000" swAng="5400000"/>
                 <a:lnTo>
-                  <a:pt x="897467" y="264120"/>
+                  <a:pt x="897467" y="238720"/>
                 </a:lnTo>
                 <a:arcTo hR="76200" wR="76200" stAng="0" swAng="5400000"/>
                 <a:lnTo>
-                  <a:pt x="76200" y="340320"/>
+                  <a:pt x="76200" y="314920"/>
                 </a:lnTo>
                 <a:arcTo hR="76200" wR="76200" stAng="5400000" swAng="5400000"/>
                 <a:lnTo>
@@ -3495,7 +3568,7 @@
           <a:ln/>
         </p:spPr>
         <p:txBody>
-          <a:bodyPr wrap="square" lIns="0" tIns="63500" rIns="0" bIns="38100" rtlCol="0" anchor="t">
+          <a:bodyPr wrap="square" lIns="0" tIns="50800" rIns="0" bIns="25400" rtlCol="0" anchor="t">
             <a:normAutofit/>
           </a:bodyPr>
           <a:lstStyle/>
@@ -3523,13 +3596,57 @@
       </p:sp>
       <p:sp>
         <p:nvSpPr>
-          <p:cNvPr id="34" name="Shape 32"/>
-          <p:cNvSpPr/>
-          <p:nvPr/>
-        </p:nvSpPr>
-        <p:spPr>
-          <a:xfrm>
-            <a:off x="812800" y="3637095"/>
+          <p:cNvPr id="35" name="Text 33"/>
+          <p:cNvSpPr/>
+          <p:nvPr/>
+        </p:nvSpPr>
+        <p:spPr>
+          <a:xfrm>
+            <a:off x="8382000" y="3230695"/>
+            <a:ext cx="2903982" cy="238720"/>
+          </a:xfrm>
+          <a:prstGeom prst="rect">
+            <a:avLst/>
+          </a:prstGeom>
+          <a:noFill/>
+          <a:ln/>
+        </p:spPr>
+        <p:txBody>
+          <a:bodyPr wrap="square" lIns="0" tIns="0" rIns="0" bIns="0" rtlCol="0" anchor="t">
+            <a:normAutofit/>
+          </a:bodyPr>
+          <a:lstStyle/>
+          <a:p>
+            <a:pPr algn="l" indent="0" marL="0">
+              <a:lnSpc>
+                <a:spcPts val="1680"/>
+              </a:lnSpc>
+              <a:buNone/>
+            </a:pPr>
+            <a:r>
+              <a:rPr lang="en-US" sz="1200" dirty="0">
+                <a:solidFill>
+                  <a:srgbClr val="4B3591"/>
+                </a:solidFill>
+                <a:latin typeface="Inter" pitchFamily="34" charset="0"/>
+                <a:ea typeface="Inter" pitchFamily="34" charset="-122"/>
+                <a:cs typeface="Inter" pitchFamily="34" charset="-120"/>
+              </a:rPr>
+              <a:t>HPA 3–6 · PDB min 2 · ConfigMap</a:t>
+            </a:r>
+            <a:endParaRPr lang="en-US" sz="1200" dirty="0"/>
+          </a:p>
+        </p:txBody>
+      </p:sp>
+      <p:sp>
+        <p:nvSpPr>
+          <p:cNvPr id="36" name="Shape 34"/>
+          <p:cNvSpPr/>
+          <p:nvPr/>
+        </p:nvSpPr>
+        <p:spPr>
+          <a:xfrm>
+            <a:off x="812800" y="3850415"/>
             <a:ext cx="5207000" cy="1028634"/>
           </a:xfrm>
           <a:prstGeom prst="roundRect">
@@ -3545,13 +3662,13 @@
       </p:sp>
       <p:sp>
         <p:nvSpPr>
-          <p:cNvPr id="35" name="Text 33"/>
-          <p:cNvSpPr/>
-          <p:nvPr/>
-        </p:nvSpPr>
-        <p:spPr>
-          <a:xfrm>
-            <a:off x="1016000" y="3814895"/>
+          <p:cNvPr id="37" name="Text 35"/>
+          <p:cNvSpPr/>
+          <p:nvPr/>
+        </p:nvSpPr>
+        <p:spPr>
+          <a:xfrm>
+            <a:off x="1016000" y="4028215"/>
             <a:ext cx="4944618" cy="238720"/>
           </a:xfrm>
           <a:prstGeom prst="rect">
@@ -3581,22 +3698,22 @@
                 <a:ea typeface="Inter" pitchFamily="34" charset="-122"/>
                 <a:cs typeface="Inter" pitchFamily="34" charset="-120"/>
               </a:rPr>
-              <a:t>CONFIGURATION · ANSIBLE</a:t>
-            </a:r>
-            <a:endParaRPr lang="en-US" sz="1200" dirty="0"/>
-          </a:p>
-        </p:txBody>
-      </p:sp>
-      <p:sp>
-        <p:nvSpPr>
-          <p:cNvPr id="36" name="Text 34"/>
-          <p:cNvSpPr/>
-          <p:nvPr/>
-        </p:nvSpPr>
-        <p:spPr>
-          <a:xfrm>
-            <a:off x="1016000" y="4129815"/>
-            <a:ext cx="1304330" cy="358114"/>
+              <a:t>CONFIGURATION · ANSIBLE ROLES</a:t>
+            </a:r>
+            <a:endParaRPr lang="en-US" sz="1200" dirty="0"/>
+          </a:p>
+        </p:txBody>
+      </p:sp>
+      <p:sp>
+        <p:nvSpPr>
+          <p:cNvPr id="38" name="Text 36"/>
+          <p:cNvSpPr/>
+          <p:nvPr/>
+        </p:nvSpPr>
+        <p:spPr>
+          <a:xfrm>
+            <a:off x="1016000" y="4343136"/>
+            <a:ext cx="1943298" cy="358114"/>
           </a:xfrm>
           <a:prstGeom prst="roundRect">
             <a:avLst>
@@ -3629,7 +3746,7 @@
                 <a:ea typeface="Inter" pitchFamily="34" charset="-122"/>
                 <a:cs typeface="Inter" pitchFamily="34" charset="-120"/>
               </a:rPr>
-              <a:t>playbook.yml</a:t>
+              <a:t>common + notes_app</a:t>
             </a:r>
             <a:endParaRPr lang="en-US" sz="1300" dirty="0"/>
           </a:p>
@@ -3637,13 +3754,13 @@
       </p:sp>
       <p:sp>
         <p:nvSpPr>
-          <p:cNvPr id="37" name="Text 35"/>
-          <p:cNvSpPr/>
-          <p:nvPr/>
-        </p:nvSpPr>
-        <p:spPr>
-          <a:xfrm>
-            <a:off x="2421930" y="4166659"/>
+          <p:cNvPr id="39" name="Text 37"/>
+          <p:cNvSpPr/>
+          <p:nvPr/>
+        </p:nvSpPr>
+        <p:spPr>
+          <a:xfrm>
+            <a:off x="3060898" y="4379979"/>
             <a:ext cx="229989" cy="309827"/>
           </a:xfrm>
           <a:prstGeom prst="rect">
@@ -3681,14 +3798,14 @@
       </p:sp>
       <p:sp>
         <p:nvSpPr>
-          <p:cNvPr id="38" name="Text 36"/>
-          <p:cNvSpPr/>
-          <p:nvPr/>
-        </p:nvSpPr>
-        <p:spPr>
-          <a:xfrm>
-            <a:off x="2702719" y="4129815"/>
-            <a:ext cx="2391701" cy="358114"/>
+          <p:cNvPr id="40" name="Text 38"/>
+          <p:cNvSpPr/>
+          <p:nvPr/>
+        </p:nvSpPr>
+        <p:spPr>
+          <a:xfrm>
+            <a:off x="3341688" y="4343136"/>
+            <a:ext cx="2424906" cy="358114"/>
           </a:xfrm>
           <a:prstGeom prst="roundRect">
             <a:avLst>
@@ -3721,7 +3838,7 @@
                 <a:ea typeface="Inter" pitchFamily="34" charset="-122"/>
                 <a:cs typeface="Inter" pitchFamily="34" charset="-120"/>
               </a:rPr>
-              <a:t>Host: packages · user · files</a:t>
+              <a:t>Ubuntu VM · venv · systemd</a:t>
             </a:r>
             <a:endParaRPr lang="en-US" sz="1300" dirty="0"/>
           </a:p>
@@ -3729,13 +3846,13 @@
       </p:sp>
       <p:sp>
         <p:nvSpPr>
-          <p:cNvPr id="39" name="Shape 37"/>
-          <p:cNvSpPr/>
-          <p:nvPr/>
-        </p:nvSpPr>
-        <p:spPr>
-          <a:xfrm>
-            <a:off x="6172200" y="3637095"/>
+          <p:cNvPr id="41" name="Shape 39"/>
+          <p:cNvSpPr/>
+          <p:nvPr/>
+        </p:nvSpPr>
+        <p:spPr>
+          <a:xfrm>
+            <a:off x="6172200" y="3850415"/>
             <a:ext cx="5207000" cy="1028634"/>
           </a:xfrm>
           <a:prstGeom prst="roundRect">
@@ -3751,13 +3868,13 @@
       </p:sp>
       <p:sp>
         <p:nvSpPr>
-          <p:cNvPr id="40" name="Text 38"/>
-          <p:cNvSpPr/>
-          <p:nvPr/>
-        </p:nvSpPr>
-        <p:spPr>
-          <a:xfrm>
-            <a:off x="6375400" y="3814895"/>
+          <p:cNvPr id="42" name="Text 40"/>
+          <p:cNvSpPr/>
+          <p:nvPr/>
+        </p:nvSpPr>
+        <p:spPr>
+          <a:xfrm>
+            <a:off x="6375400" y="4028215"/>
             <a:ext cx="4944618" cy="238720"/>
           </a:xfrm>
           <a:prstGeom prst="rect">
@@ -3795,14 +3912,14 @@
       </p:sp>
       <p:sp>
         <p:nvSpPr>
-          <p:cNvPr id="41" name="Text 39"/>
-          <p:cNvSpPr/>
-          <p:nvPr/>
-        </p:nvSpPr>
-        <p:spPr>
-          <a:xfrm>
-            <a:off x="6375400" y="4129815"/>
-            <a:ext cx="1333500" cy="358114"/>
+          <p:cNvPr id="43" name="Text 41"/>
+          <p:cNvSpPr/>
+          <p:nvPr/>
+        </p:nvSpPr>
+        <p:spPr>
+          <a:xfrm>
+            <a:off x="6375400" y="4343136"/>
+            <a:ext cx="866973" cy="358114"/>
           </a:xfrm>
           <a:prstGeom prst="roundRect">
             <a:avLst>
@@ -3835,7 +3952,7 @@
                 <a:ea typeface="Inter" pitchFamily="34" charset="-122"/>
                 <a:cs typeface="Inter" pitchFamily="34" charset="-120"/>
               </a:rPr>
-              <a:t>Pods /metrics</a:t>
+              <a:t>/metrics</a:t>
             </a:r>
             <a:endParaRPr lang="en-US" sz="1300" dirty="0"/>
           </a:p>
@@ -3843,13 +3960,13 @@
       </p:sp>
       <p:sp>
         <p:nvSpPr>
-          <p:cNvPr id="42" name="Text 40"/>
-          <p:cNvSpPr/>
-          <p:nvPr/>
-        </p:nvSpPr>
-        <p:spPr>
-          <a:xfrm>
-            <a:off x="7810500" y="4166659"/>
+          <p:cNvPr id="44" name="Text 42"/>
+          <p:cNvSpPr/>
+          <p:nvPr/>
+        </p:nvSpPr>
+        <p:spPr>
+          <a:xfrm>
+            <a:off x="7331273" y="4379979"/>
             <a:ext cx="226153" cy="309827"/>
           </a:xfrm>
           <a:prstGeom prst="rect">
@@ -3887,14 +4004,14 @@
       </p:sp>
       <p:sp>
         <p:nvSpPr>
-          <p:cNvPr id="43" name="Text 41"/>
-          <p:cNvSpPr/>
-          <p:nvPr/>
-        </p:nvSpPr>
-        <p:spPr>
-          <a:xfrm>
-            <a:off x="8087453" y="4129815"/>
-            <a:ext cx="1192940" cy="358114"/>
+          <p:cNvPr id="45" name="Text 43"/>
+          <p:cNvSpPr/>
+          <p:nvPr/>
+        </p:nvSpPr>
+        <p:spPr>
+          <a:xfrm>
+            <a:off x="7595526" y="4343136"/>
+            <a:ext cx="1813587" cy="358114"/>
           </a:xfrm>
           <a:prstGeom prst="roundRect">
             <a:avLst>
@@ -3927,7 +4044,7 @@
                 <a:ea typeface="Inter" pitchFamily="34" charset="-122"/>
                 <a:cs typeface="Inter" pitchFamily="34" charset="-120"/>
               </a:rPr>
-              <a:t>Prometheus</a:t>
+              <a:t>Prometheus + alerts</a:t>
             </a:r>
             <a:endParaRPr lang="en-US" sz="1300" dirty="0"/>
           </a:p>
@@ -3935,13 +4052,13 @@
       </p:sp>
       <p:sp>
         <p:nvSpPr>
-          <p:cNvPr id="44" name="Text 42"/>
-          <p:cNvSpPr/>
-          <p:nvPr/>
-        </p:nvSpPr>
-        <p:spPr>
-          <a:xfrm>
-            <a:off x="9381993" y="4166659"/>
+          <p:cNvPr id="46" name="Text 44"/>
+          <p:cNvSpPr/>
+          <p:nvPr/>
+        </p:nvSpPr>
+        <p:spPr>
+          <a:xfrm>
+            <a:off x="9498013" y="4379979"/>
             <a:ext cx="226153" cy="309827"/>
           </a:xfrm>
           <a:prstGeom prst="rect">
@@ -3979,14 +4096,14 @@
       </p:sp>
       <p:sp>
         <p:nvSpPr>
-          <p:cNvPr id="45" name="Text 43"/>
-          <p:cNvSpPr/>
-          <p:nvPr/>
-        </p:nvSpPr>
-        <p:spPr>
-          <a:xfrm>
-            <a:off x="9658945" y="4129815"/>
-            <a:ext cx="862939" cy="358114"/>
+          <p:cNvPr id="47" name="Text 45"/>
+          <p:cNvSpPr/>
+          <p:nvPr/>
+        </p:nvSpPr>
+        <p:spPr>
+          <a:xfrm>
+            <a:off x="9762265" y="4343136"/>
+            <a:ext cx="837539" cy="358114"/>
           </a:xfrm>
           <a:prstGeom prst="roundRect">
             <a:avLst>
@@ -4027,13 +4144,13 @@
       </p:sp>
       <p:sp>
         <p:nvSpPr>
-          <p:cNvPr id="46" name="Text 44"/>
-          <p:cNvSpPr/>
-          <p:nvPr/>
-        </p:nvSpPr>
-        <p:spPr>
-          <a:xfrm>
-            <a:off x="812800" y="4919729"/>
+          <p:cNvPr id="48" name="Text 46"/>
+          <p:cNvSpPr/>
+          <p:nvPr/>
+        </p:nvSpPr>
+        <p:spPr>
+          <a:xfrm>
+            <a:off x="812800" y="5133049"/>
             <a:ext cx="10883392" cy="238720"/>
           </a:xfrm>
           <a:prstGeom prst="rect">
@@ -4085,22 +4202,22 @@
                 <a:ea typeface="Inter" pitchFamily="34" charset="-122"/>
                 <a:cs typeface="Inter" pitchFamily="34" charset="-120"/>
               </a:rPr>
-              <a:t>/health · /version · /notes · /metrics · /boom</a:t>
-            </a:r>
-            <a:endParaRPr lang="en-US" sz="1200" dirty="0"/>
-          </a:p>
-        </p:txBody>
-      </p:sp>
-      <p:sp>
-        <p:nvSpPr>
-          <p:cNvPr id="47" name="Text 45"/>
+              <a:t>/health · /ready · /version · /notes · /metrics · /boom · /slow</a:t>
+            </a:r>
+            <a:endParaRPr lang="en-US" sz="1200" dirty="0"/>
+          </a:p>
+        </p:txBody>
+      </p:sp>
+      <p:sp>
+        <p:nvSpPr>
+          <p:cNvPr id="49" name="Text 47"/>
           <p:cNvSpPr/>
           <p:nvPr/>
         </p:nvSpPr>
         <p:spPr>
           <a:xfrm>
             <a:off x="812800" y="6238280"/>
-            <a:ext cx="7031752" cy="238720"/>
+            <a:ext cx="7644051" cy="238720"/>
           </a:xfrm>
           <a:prstGeom prst="rect">
             <a:avLst/>
@@ -4129,15 +4246,15 @@
                 <a:ea typeface="Inter" pitchFamily="34" charset="-122"/>
                 <a:cs typeface="Inter" pitchFamily="34" charset="-120"/>
               </a:rPr>
-              <a:t>Flask app · GitHub Actions · Ansible · Docker · Kubernetes · Prometheus · Grafana</a:t>
-            </a:r>
-            <a:endParaRPr lang="en-US" sz="1200" dirty="0"/>
-          </a:p>
-        </p:txBody>
-      </p:sp>
-      <p:sp>
-        <p:nvSpPr>
-          <p:cNvPr id="48" name="Text 46"/>
+              <a:t>Flask + gunicorn · GitHub Actions · Ansible · Docker · Kubernetes · Prometheus · Grafana</a:t>
+            </a:r>
+            <a:endParaRPr lang="en-US" sz="1200" dirty="0"/>
+          </a:p>
+        </p:txBody>
+      </p:sp>
+      <p:sp>
+        <p:nvSpPr>
+          <p:cNvPr id="50" name="Text 48"/>
           <p:cNvSpPr/>
           <p:nvPr/>
         </p:nvSpPr>
@@ -4620,7 +4737,7 @@
         <p:spPr>
           <a:xfrm>
             <a:off x="819150" y="1987485"/>
-            <a:ext cx="2533650" cy="3001830"/>
+            <a:ext cx="2533650" cy="3169510"/>
           </a:xfrm>
           <a:prstGeom prst="roundRect">
             <a:avLst>
@@ -4735,7 +4852,7 @@
         <p:spPr>
           <a:xfrm>
             <a:off x="1019556" y="2806568"/>
-            <a:ext cx="2209102" cy="1594776"/>
+            <a:ext cx="2209102" cy="1762456"/>
           </a:xfrm>
           <a:prstGeom prst="rect">
             <a:avLst/>
@@ -4751,7 +4868,7 @@
           <a:p>
             <a:pPr algn="l" marL="148844" indent="-148844">
               <a:lnSpc>
-                <a:spcPts val="1740"/>
+                <a:spcPts val="1680"/>
               </a:lnSpc>
               <a:buSzPct val="100000"/>
               <a:buChar char="•"/>
@@ -4765,14 +4882,14 @@
                 <a:ea typeface="Inter" pitchFamily="34" charset="-122"/>
                 <a:cs typeface="Inter" pitchFamily="34" charset="-120"/>
               </a:rPr>
-              <a:t>Trigger: push or PR to main</a:t>
+              <a:t>Lint: ruff, hadolint, yamllint, ansible-lint, kubeconform</a:t>
             </a:r>
             <a:endParaRPr lang="en-US" sz="1200" dirty="0"/>
           </a:p>
           <a:p>
             <a:pPr algn="l" marL="148844" indent="-148844">
               <a:lnSpc>
-                <a:spcPts val="1740"/>
+                <a:spcPts val="1680"/>
               </a:lnSpc>
               <a:buSzPct val="100000"/>
               <a:buChar char="•"/>
@@ -4786,14 +4903,14 @@
                 <a:ea typeface="Inter" pitchFamily="34" charset="-122"/>
                 <a:cs typeface="Inter" pitchFamily="34" charset="-120"/>
               </a:rPr>
-              <a:t>Test: pytest, Python 3.12</a:t>
+              <a:t>pytest, coverage ≥ 85%</a:t>
             </a:r>
             <a:endParaRPr lang="en-US" sz="1200" dirty="0"/>
           </a:p>
           <a:p>
             <a:pPr algn="l" marL="148844" indent="-148844">
               <a:lnSpc>
-                <a:spcPts val="1740"/>
+                <a:spcPts val="1680"/>
               </a:lnSpc>
               <a:buSzPct val="100000"/>
               <a:buChar char="•"/>
@@ -4807,14 +4924,14 @@
                 <a:ea typeface="Inter" pitchFamily="34" charset="-122"/>
                 <a:cs typeface="Inter" pitchFamily="34" charset="-120"/>
               </a:rPr>
-              <a:t>Build: image tagged by SHA</a:t>
+              <a:t>Build once, smoke test</a:t>
             </a:r>
             <a:endParaRPr lang="en-US" sz="1200" dirty="0"/>
           </a:p>
           <a:p>
             <a:pPr algn="l" marL="148844" indent="-148844">
               <a:lnSpc>
-                <a:spcPts val="1740"/>
+                <a:spcPts val="1680"/>
               </a:lnSpc>
               <a:buSzPct val="100000"/>
               <a:buChar char="•"/>
@@ -4828,14 +4945,14 @@
                 <a:ea typeface="Inter" pitchFamily="34" charset="-122"/>
                 <a:cs typeface="Inter" pitchFamily="34" charset="-120"/>
               </a:rPr>
-              <a:t>Smoke test /health, /metrics</a:t>
+              <a:t>Trivy image + config scan</a:t>
             </a:r>
             <a:endParaRPr lang="en-US" sz="1200" dirty="0"/>
           </a:p>
           <a:p>
             <a:pPr algn="l" marL="148844" indent="-148844">
               <a:lnSpc>
-                <a:spcPts val="1740"/>
+                <a:spcPts val="1680"/>
               </a:lnSpc>
               <a:buSzPct val="100000"/>
               <a:buChar char="•"/>
@@ -4849,7 +4966,7 @@
                 <a:ea typeface="Inter" pitchFamily="34" charset="-122"/>
                 <a:cs typeface="Inter" pitchFamily="34" charset="-120"/>
               </a:rPr>
-              <a:t>Deploy: validate manifests</a:t>
+              <a:t>Deploy to kind, push to GHCR</a:t>
             </a:r>
             <a:endParaRPr lang="en-US" sz="1200" dirty="0"/>
           </a:p>
@@ -4863,7 +4980,7 @@
         </p:nvSpPr>
         <p:spPr>
           <a:xfrm>
-            <a:off x="1003300" y="4464844"/>
+            <a:off x="1003300" y="4632523"/>
             <a:ext cx="2165350" cy="340320"/>
           </a:xfrm>
           <a:prstGeom prst="roundRect">
@@ -4897,7 +5014,7 @@
                 <a:ea typeface="Inter" pitchFamily="34" charset="-122"/>
                 <a:cs typeface="Inter" pitchFamily="34" charset="-120"/>
               </a:rPr>
-              <a:t>Test › Build › Deploy</a:t>
+              <a:t>Auto-rollback on failure</a:t>
             </a:r>
             <a:endParaRPr lang="en-US" sz="1200" dirty="0"/>
           </a:p>
@@ -4912,7 +5029,7 @@
         <p:spPr>
           <a:xfrm>
             <a:off x="3492500" y="1987485"/>
-            <a:ext cx="2533650" cy="3001830"/>
+            <a:ext cx="2533650" cy="3169510"/>
           </a:xfrm>
           <a:prstGeom prst="roundRect">
             <a:avLst>
@@ -5012,7 +5129,7 @@
                 <a:ea typeface="Inter" pitchFamily="34" charset="-122"/>
                 <a:cs typeface="Inter" pitchFamily="34" charset="-120"/>
               </a:rPr>
-              <a:t>Ansible</a:t>
+              <a:t>Ansible roles</a:t>
             </a:r>
             <a:endParaRPr lang="en-US" sz="1600" dirty="0"/>
           </a:p>
@@ -5027,7 +5144,7 @@
         <p:spPr>
           <a:xfrm>
             <a:off x="3692906" y="2806568"/>
-            <a:ext cx="2209102" cy="1594776"/>
+            <a:ext cx="2209102" cy="1762456"/>
           </a:xfrm>
           <a:prstGeom prst="rect">
             <a:avLst/>
@@ -5043,7 +5160,7 @@
           <a:p>
             <a:pPr algn="l" marL="148844" indent="-148844">
               <a:lnSpc>
-                <a:spcPts val="1740"/>
+                <a:spcPts val="1680"/>
               </a:lnSpc>
               <a:buSzPct val="100000"/>
               <a:buChar char="•"/>
@@ -5057,14 +5174,14 @@
                 <a:ea typeface="Inter" pitchFamily="34" charset="-122"/>
                 <a:cs typeface="Inter" pitchFamily="34" charset="-120"/>
               </a:rPr>
-              <a:t>apt: python3, pip, git, curl</a:t>
+              <a:t>common: packages, timezone, admin users</a:t>
             </a:r>
             <a:endParaRPr lang="en-US" sz="1200" dirty="0"/>
           </a:p>
           <a:p>
             <a:pPr algn="l" marL="148844" indent="-148844">
               <a:lnSpc>
-                <a:spcPts val="1740"/>
+                <a:spcPts val="1680"/>
               </a:lnSpc>
               <a:buSzPct val="100000"/>
               <a:buChar char="•"/>
@@ -5078,14 +5195,14 @@
                 <a:ea typeface="Inter" pitchFamily="34" charset="-122"/>
                 <a:cs typeface="Inter" pitchFamily="34" charset="-120"/>
               </a:rPr>
-              <a:t>Create notesapp user</a:t>
+              <a:t>notes_app: nologin user, dirs, .env 0600</a:t>
             </a:r>
             <a:endParaRPr lang="en-US" sz="1200" dirty="0"/>
           </a:p>
           <a:p>
             <a:pPr algn="l" marL="148844" indent="-148844">
               <a:lnSpc>
-                <a:spcPts val="1740"/>
+                <a:spcPts val="1680"/>
               </a:lnSpc>
               <a:buSzPct val="100000"/>
               <a:buChar char="•"/>
@@ -5099,14 +5216,14 @@
                 <a:ea typeface="Inter" pitchFamily="34" charset="-122"/>
                 <a:cs typeface="Inter" pitchFamily="34" charset="-120"/>
               </a:rPr>
-              <a:t>Own /opt/notes-service</a:t>
+              <a:t>Deps in a virtualenv</a:t>
             </a:r>
             <a:endParaRPr lang="en-US" sz="1200" dirty="0"/>
           </a:p>
           <a:p>
             <a:pPr algn="l" marL="148844" indent="-148844">
               <a:lnSpc>
-                <a:spcPts val="1740"/>
+                <a:spcPts val="1680"/>
               </a:lnSpc>
               <a:buSzPct val="100000"/>
               <a:buChar char="•"/>
@@ -5120,14 +5237,14 @@
                 <a:ea typeface="Inter" pitchFamily="34" charset="-122"/>
                 <a:cs typeface="Inter" pitchFamily="34" charset="-120"/>
               </a:rPr>
-              <a:t>Write .env with mode 0600</a:t>
+              <a:t>systemd unit + logrotate</a:t>
             </a:r>
             <a:endParaRPr lang="en-US" sz="1200" dirty="0"/>
           </a:p>
           <a:p>
             <a:pPr algn="l" marL="148844" indent="-148844">
               <a:lnSpc>
-                <a:spcPts val="1740"/>
+                <a:spcPts val="1680"/>
               </a:lnSpc>
               <a:buSzPct val="100000"/>
               <a:buChar char="•"/>
@@ -5141,7 +5258,7 @@
                 <a:ea typeface="Inter" pitchFamily="34" charset="-122"/>
                 <a:cs typeface="Inter" pitchFamily="34" charset="-120"/>
               </a:rPr>
-              <a:t>pip install requirements</a:t>
+              <a:t>Checks /health and /version</a:t>
             </a:r>
             <a:endParaRPr lang="en-US" sz="1200" dirty="0"/>
           </a:p>
@@ -5155,7 +5272,7 @@
         </p:nvSpPr>
         <p:spPr>
           <a:xfrm>
-            <a:off x="3676650" y="4464844"/>
+            <a:off x="3676650" y="4632523"/>
             <a:ext cx="2165350" cy="340320"/>
           </a:xfrm>
           <a:prstGeom prst="roundRect">
@@ -5189,7 +5306,7 @@
                 <a:ea typeface="Inter" pitchFamily="34" charset="-122"/>
                 <a:cs typeface="Inter" pitchFamily="34" charset="-120"/>
               </a:rPr>
-              <a:t>Re-run: changed 6 → 0</a:t>
+              <a:t>Re-run: changed=0</a:t>
             </a:r>
             <a:endParaRPr lang="en-US" sz="1200" dirty="0"/>
           </a:p>
@@ -5204,7 +5321,7 @@
         <p:spPr>
           <a:xfrm>
             <a:off x="6165850" y="1987485"/>
-            <a:ext cx="2533650" cy="3001830"/>
+            <a:ext cx="2533650" cy="3169510"/>
           </a:xfrm>
           <a:prstGeom prst="roundRect">
             <a:avLst>
@@ -5319,7 +5436,7 @@
         <p:spPr>
           <a:xfrm>
             <a:off x="6366256" y="2806568"/>
-            <a:ext cx="2209102" cy="1594776"/>
+            <a:ext cx="2209102" cy="1762456"/>
           </a:xfrm>
           <a:prstGeom prst="rect">
             <a:avLst/>
@@ -5335,7 +5452,7 @@
           <a:p>
             <a:pPr algn="l" marL="148844" indent="-148844">
               <a:lnSpc>
-                <a:spcPts val="1740"/>
+                <a:spcPts val="1680"/>
               </a:lnSpc>
               <a:buSzPct val="100000"/>
               <a:buChar char="•"/>
@@ -5349,14 +5466,14 @@
                 <a:ea typeface="Inter" pitchFamily="34" charset="-122"/>
                 <a:cs typeface="Inter" pitchFamily="34" charset="-120"/>
               </a:rPr>
-              <a:t>python:3.12-slim, non-root</a:t>
+              <a:t>Multi-stage, non-root, read-only FS</a:t>
             </a:r>
             <a:endParaRPr lang="en-US" sz="1200" dirty="0"/>
           </a:p>
           <a:p>
             <a:pPr algn="l" marL="148844" indent="-148844">
               <a:lnSpc>
-                <a:spcPts val="1740"/>
+                <a:spcPts val="1680"/>
               </a:lnSpc>
               <a:buSzPct val="100000"/>
               <a:buChar char="•"/>
@@ -5370,14 +5487,14 @@
                 <a:ea typeface="Inter" pitchFamily="34" charset="-122"/>
                 <a:cs typeface="Inter" pitchFamily="34" charset="-120"/>
               </a:rPr>
-              <a:t>3 replicas, NodePort 30080</a:t>
+              <a:t>3 replicas, HPA 3–6, PDB 2</a:t>
             </a:r>
             <a:endParaRPr lang="en-US" sz="1200" dirty="0"/>
           </a:p>
           <a:p>
             <a:pPr algn="l" marL="148844" indent="-148844">
               <a:lnSpc>
-                <a:spcPts val="1740"/>
+                <a:spcPts val="1680"/>
               </a:lnSpc>
               <a:buSzPct val="100000"/>
               <a:buChar char="•"/>
@@ -5391,14 +5508,14 @@
                 <a:ea typeface="Inter" pitchFamily="34" charset="-122"/>
                 <a:cs typeface="Inter" pitchFamily="34" charset="-120"/>
               </a:rPr>
-              <a:t>Probes on /health</a:t>
+              <a:t>/ready and /health probes</a:t>
             </a:r>
             <a:endParaRPr lang="en-US" sz="1200" dirty="0"/>
           </a:p>
           <a:p>
             <a:pPr algn="l" marL="148844" indent="-148844">
               <a:lnSpc>
-                <a:spcPts val="1740"/>
+                <a:spcPts val="1680"/>
               </a:lnSpc>
               <a:buSzPct val="100000"/>
               <a:buChar char="•"/>
@@ -5419,7 +5536,7 @@
           <a:p>
             <a:pPr algn="l" marL="148844" indent="-148844">
               <a:lnSpc>
-                <a:spcPts val="1740"/>
+                <a:spcPts val="1680"/>
               </a:lnSpc>
               <a:buSzPct val="100000"/>
               <a:buChar char="•"/>
@@ -5433,7 +5550,7 @@
                 <a:ea typeface="Inter" pitchFamily="34" charset="-122"/>
                 <a:cs typeface="Inter" pitchFamily="34" charset="-120"/>
               </a:rPr>
-              <a:t>Rollback: rollout undo</a:t>
+              <a:t>60 s deadline, preStop 5 s</a:t>
             </a:r>
             <a:endParaRPr lang="en-US" sz="1200" dirty="0"/>
           </a:p>
@@ -5447,7 +5564,7 @@
         </p:nvSpPr>
         <p:spPr>
           <a:xfrm>
-            <a:off x="6350000" y="4464844"/>
+            <a:off x="6350000" y="4632523"/>
             <a:ext cx="2165350" cy="340320"/>
           </a:xfrm>
           <a:prstGeom prst="roundRect">
@@ -5496,7 +5613,7 @@
         <p:spPr>
           <a:xfrm>
             <a:off x="8839200" y="1987485"/>
-            <a:ext cx="2533650" cy="3001830"/>
+            <a:ext cx="2533650" cy="3169510"/>
           </a:xfrm>
           <a:prstGeom prst="roundRect">
             <a:avLst>
@@ -5611,7 +5728,7 @@
         <p:spPr>
           <a:xfrm>
             <a:off x="9039606" y="3050381"/>
-            <a:ext cx="2209102" cy="1350963"/>
+            <a:ext cx="2209102" cy="1518642"/>
           </a:xfrm>
           <a:prstGeom prst="rect">
             <a:avLst/>
@@ -5627,7 +5744,7 @@
           <a:p>
             <a:pPr algn="l" marL="148844" indent="-148844">
               <a:lnSpc>
-                <a:spcPts val="1740"/>
+                <a:spcPts val="1680"/>
               </a:lnSpc>
               <a:buSzPct val="100000"/>
               <a:buChar char="•"/>
@@ -5648,7 +5765,7 @@
           <a:p>
             <a:pPr algn="l" marL="148844" indent="-148844">
               <a:lnSpc>
-                <a:spcPts val="1740"/>
+                <a:spcPts val="1680"/>
               </a:lnSpc>
               <a:buSzPct val="100000"/>
               <a:buChar char="•"/>
@@ -5662,14 +5779,14 @@
                 <a:ea typeface="Inter" pitchFamily="34" charset="-122"/>
                 <a:cs typeface="Inter" pitchFamily="34" charset="-120"/>
               </a:rPr>
-              <a:t>Uptime from up{job}</a:t>
+              <a:t>Four golden signals</a:t>
             </a:r>
             <a:endParaRPr lang="en-US" sz="1200" dirty="0"/>
           </a:p>
           <a:p>
             <a:pPr algn="l" marL="148844" indent="-148844">
               <a:lnSpc>
-                <a:spcPts val="1740"/>
+                <a:spcPts val="1680"/>
               </a:lnSpc>
               <a:buSzPct val="100000"/>
               <a:buChar char="•"/>
@@ -5683,14 +5800,14 @@
                 <a:ea typeface="Inter" pitchFamily="34" charset="-122"/>
                 <a:cs typeface="Inter" pitchFamily="34" charset="-120"/>
               </a:rPr>
-              <a:t>Request rate, p95 latency</a:t>
+              <a:t>Dashboard provisioned as code</a:t>
             </a:r>
             <a:endParaRPr lang="en-US" sz="1200" dirty="0"/>
           </a:p>
           <a:p>
             <a:pPr algn="l" marL="148844" indent="-148844">
               <a:lnSpc>
-                <a:spcPts val="1740"/>
+                <a:spcPts val="1680"/>
               </a:lnSpc>
               <a:buSzPct val="100000"/>
               <a:buChar char="•"/>
@@ -5704,14 +5821,14 @@
                 <a:ea typeface="Inter" pitchFamily="34" charset="-122"/>
                 <a:cs typeface="Inter" pitchFamily="34" charset="-120"/>
               </a:rPr>
-              <a:t>Error rate % from 5xx</a:t>
+              <a:t>Alerts: down, errors &gt; 5%, p95 &gt; 500 ms</a:t>
             </a:r>
             <a:endParaRPr lang="en-US" sz="1200" dirty="0"/>
           </a:p>
           <a:p>
             <a:pPr algn="l" marL="148844" indent="-148844">
               <a:lnSpc>
-                <a:spcPts val="1740"/>
+                <a:spcPts val="1680"/>
               </a:lnSpc>
               <a:buSzPct val="100000"/>
               <a:buChar char="•"/>
@@ -5725,7 +5842,7 @@
                 <a:ea typeface="Inter" pitchFamily="34" charset="-122"/>
                 <a:cs typeface="Inter" pitchFamily="34" charset="-120"/>
               </a:rPr>
-              <a:t>Datasource auto-provisioned</a:t>
+              <a:t>Logs via kubectl logs</a:t>
             </a:r>
             <a:endParaRPr lang="en-US" sz="1200" dirty="0"/>
           </a:p>
@@ -5739,7 +5856,7 @@
         </p:nvSpPr>
         <p:spPr>
           <a:xfrm>
-            <a:off x="9023350" y="4464844"/>
+            <a:off x="9023350" y="4632523"/>
             <a:ext cx="2165350" cy="340320"/>
           </a:xfrm>
           <a:prstGeom prst="roundRect">
@@ -5773,7 +5890,7 @@
                 <a:ea typeface="Inter" pitchFamily="34" charset="-122"/>
                 <a:cs typeface="Inter" pitchFamily="34" charset="-120"/>
               </a:rPr>
-              <a:t>4 dashboard panels</a:t>
+              <a:t>13 panels · 3 alerts</a:t>
             </a:r>
             <a:endParaRPr lang="en-US" sz="1200" dirty="0"/>
           </a:p>
@@ -5788,7 +5905,7 @@
         <p:spPr>
           <a:xfrm>
             <a:off x="812800" y="6238280"/>
-            <a:ext cx="4533027" cy="238720"/>
+            <a:ext cx="4484688" cy="238720"/>
           </a:xfrm>
           <a:prstGeom prst="rect">
             <a:avLst/>
@@ -5817,7 +5934,7 @@
                 <a:ea typeface="Inter" pitchFamily="34" charset="-122"/>
                 <a:cs typeface="Inter" pitchFamily="34" charset="-120"/>
               </a:rPr>
-              <a:t>ci.yml · playbook.yml · Dockerfile · k8s/ · monitoring/</a:t>
+              <a:t>ci.yml · ansible/roles · Dockerfile · k8s/ · monitoring/</a:t>
             </a:r>
             <a:endParaRPr lang="en-US" sz="1200" dirty="0"/>
           </a:p>
@@ -6308,358 +6425,6 @@
         <p:spPr>
           <a:xfrm>
             <a:off x="812800" y="1981135"/>
-            <a:ext cx="5207000" cy="1465395"/>
-          </a:xfrm>
-          <a:prstGeom prst="roundRect">
-            <a:avLst>
-              <a:gd name="adj" fmla="val 8667"/>
-            </a:avLst>
-          </a:prstGeom>
-          <a:solidFill>
-            <a:srgbClr val="FFFFFF"/>
-          </a:solidFill>
-          <a:ln/>
-        </p:spPr>
-      </p:sp>
-      <p:sp>
-        <p:nvSpPr>
-          <p:cNvPr id="13" name="Text 11"/>
-          <p:cNvSpPr/>
-          <p:nvPr/>
-        </p:nvSpPr>
-        <p:spPr>
-          <a:xfrm>
-            <a:off x="1041400" y="2184335"/>
-            <a:ext cx="4892294" cy="269214"/>
-          </a:xfrm>
-          <a:prstGeom prst="rect">
-            <a:avLst/>
-          </a:prstGeom>
-          <a:noFill/>
-          <a:ln/>
-        </p:spPr>
-        <p:txBody>
-          <a:bodyPr wrap="square" lIns="0" tIns="0" rIns="0" bIns="0" rtlCol="0" anchor="t">
-            <a:normAutofit/>
-          </a:bodyPr>
-          <a:lstStyle/>
-          <a:p>
-            <a:pPr algn="l" indent="0" marL="0">
-              <a:lnSpc>
-                <a:spcPts val="1920"/>
-              </a:lnSpc>
-              <a:buNone/>
-            </a:pPr>
-            <a:r>
-              <a:rPr lang="en-US" sz="1600" b="1" dirty="0">
-                <a:solidFill>
-                  <a:srgbClr val="7A4D39"/>
-                </a:solidFill>
-                <a:latin typeface="Inter" pitchFamily="34" charset="0"/>
-                <a:ea typeface="Inter" pitchFamily="34" charset="-122"/>
-                <a:cs typeface="Inter" pitchFamily="34" charset="-120"/>
-              </a:rPr>
-              <a:t>01</a:t>
-            </a:r>
-            <a:r>
-              <a:rPr lang="en-US" sz="1600" b="1" dirty="0">
-                <a:solidFill>
-                  <a:srgbClr val="2A2340"/>
-                </a:solidFill>
-                <a:latin typeface="Inter" pitchFamily="34" charset="0"/>
-                <a:ea typeface="Inter" pitchFamily="34" charset="-122"/>
-                <a:cs typeface="Inter" pitchFamily="34" charset="-120"/>
-              </a:rPr>
-              <a:t> pip blocked on the host</a:t>
-            </a:r>
-            <a:endParaRPr lang="en-US" sz="1600" dirty="0"/>
-          </a:p>
-        </p:txBody>
-      </p:sp>
-      <p:sp>
-        <p:nvSpPr>
-          <p:cNvPr id="14" name="Text 12"/>
-          <p:cNvSpPr/>
-          <p:nvPr/>
-        </p:nvSpPr>
-        <p:spPr>
-          <a:xfrm>
-            <a:off x="1041400" y="2504348"/>
-            <a:ext cx="4892294" cy="467254"/>
-          </a:xfrm>
-          <a:prstGeom prst="rect">
-            <a:avLst/>
-          </a:prstGeom>
-          <a:noFill/>
-          <a:ln/>
-        </p:spPr>
-        <p:txBody>
-          <a:bodyPr wrap="square" lIns="0" tIns="0" rIns="0" bIns="0" rtlCol="0" anchor="t">
-            <a:normAutofit/>
-          </a:bodyPr>
-          <a:lstStyle/>
-          <a:p>
-            <a:pPr algn="l" indent="0" marL="0">
-              <a:lnSpc>
-                <a:spcPts val="1740"/>
-              </a:lnSpc>
-              <a:buNone/>
-            </a:pPr>
-            <a:r>
-              <a:rPr lang="en-US" sz="1200" dirty="0">
-                <a:solidFill>
-                  <a:srgbClr val="5A5468"/>
-                </a:solidFill>
-                <a:latin typeface="Inter" pitchFamily="34" charset="0"/>
-                <a:ea typeface="Inter" pitchFamily="34" charset="-122"/>
-                <a:cs typeface="Inter" pitchFamily="34" charset="-120"/>
-              </a:rPr>
-              <a:t>Ubuntu marks system Python as externally managed (PEP 668), so the pip task failed.</a:t>
-            </a:r>
-            <a:endParaRPr lang="en-US" sz="1200" dirty="0"/>
-          </a:p>
-        </p:txBody>
-      </p:sp>
-      <p:sp>
-        <p:nvSpPr>
-          <p:cNvPr id="15" name="Text 13"/>
-          <p:cNvSpPr/>
-          <p:nvPr/>
-        </p:nvSpPr>
-        <p:spPr>
-          <a:xfrm>
-            <a:off x="1041400" y="3022402"/>
-            <a:ext cx="4892294" cy="246327"/>
-          </a:xfrm>
-          <a:prstGeom prst="rect">
-            <a:avLst/>
-          </a:prstGeom>
-          <a:noFill/>
-          <a:ln/>
-        </p:spPr>
-        <p:txBody>
-          <a:bodyPr wrap="square" lIns="0" tIns="0" rIns="0" bIns="0" rtlCol="0" anchor="t">
-            <a:normAutofit/>
-          </a:bodyPr>
-          <a:lstStyle/>
-          <a:p>
-            <a:pPr algn="l" indent="0" marL="0">
-              <a:lnSpc>
-                <a:spcPts val="1740"/>
-              </a:lnSpc>
-              <a:buNone/>
-            </a:pPr>
-            <a:r>
-              <a:rPr lang="en-US" sz="1200" b="1" dirty="0">
-                <a:solidFill>
-                  <a:srgbClr val="4B3591"/>
-                </a:solidFill>
-                <a:latin typeface="Inter" pitchFamily="34" charset="0"/>
-                <a:ea typeface="Inter" pitchFamily="34" charset="-122"/>
-                <a:cs typeface="Inter" pitchFamily="34" charset="-120"/>
-              </a:rPr>
-              <a:t>Fix</a:t>
-            </a:r>
-            <a:r>
-              <a:rPr lang="en-US" sz="1200" dirty="0">
-                <a:solidFill>
-                  <a:srgbClr val="2A2340"/>
-                </a:solidFill>
-                <a:latin typeface="Inter" pitchFamily="34" charset="0"/>
-                <a:ea typeface="Inter" pitchFamily="34" charset="-122"/>
-                <a:cs typeface="Inter" pitchFamily="34" charset="-120"/>
-              </a:rPr>
-              <a:t> Pass --break-system-packages in the Ansible pip task.</a:t>
-            </a:r>
-            <a:endParaRPr lang="en-US" sz="1200" dirty="0"/>
-          </a:p>
-        </p:txBody>
-      </p:sp>
-      <p:sp>
-        <p:nvSpPr>
-          <p:cNvPr id="16" name="Shape 14"/>
-          <p:cNvSpPr/>
-          <p:nvPr/>
-        </p:nvSpPr>
-        <p:spPr>
-          <a:xfrm>
-            <a:off x="6172200" y="1981135"/>
-            <a:ext cx="5207000" cy="1465395"/>
-          </a:xfrm>
-          <a:prstGeom prst="roundRect">
-            <a:avLst>
-              <a:gd name="adj" fmla="val 8667"/>
-            </a:avLst>
-          </a:prstGeom>
-          <a:solidFill>
-            <a:srgbClr val="FFFFFF"/>
-          </a:solidFill>
-          <a:ln/>
-        </p:spPr>
-      </p:sp>
-      <p:sp>
-        <p:nvSpPr>
-          <p:cNvPr id="17" name="Text 15"/>
-          <p:cNvSpPr/>
-          <p:nvPr/>
-        </p:nvSpPr>
-        <p:spPr>
-          <a:xfrm>
-            <a:off x="6400800" y="2184335"/>
-            <a:ext cx="4892294" cy="269214"/>
-          </a:xfrm>
-          <a:prstGeom prst="rect">
-            <a:avLst/>
-          </a:prstGeom>
-          <a:noFill/>
-          <a:ln/>
-        </p:spPr>
-        <p:txBody>
-          <a:bodyPr wrap="square" lIns="0" tIns="0" rIns="0" bIns="0" rtlCol="0" anchor="t">
-            <a:normAutofit/>
-          </a:bodyPr>
-          <a:lstStyle/>
-          <a:p>
-            <a:pPr algn="l" indent="0" marL="0">
-              <a:lnSpc>
-                <a:spcPts val="1920"/>
-              </a:lnSpc>
-              <a:buNone/>
-            </a:pPr>
-            <a:r>
-              <a:rPr lang="en-US" sz="1600" b="1" dirty="0">
-                <a:solidFill>
-                  <a:srgbClr val="7A4D39"/>
-                </a:solidFill>
-                <a:latin typeface="Inter" pitchFamily="34" charset="0"/>
-                <a:ea typeface="Inter" pitchFamily="34" charset="-122"/>
-                <a:cs typeface="Inter" pitchFamily="34" charset="-120"/>
-              </a:rPr>
-              <a:t>02</a:t>
-            </a:r>
-            <a:r>
-              <a:rPr lang="en-US" sz="1600" b="1" dirty="0">
-                <a:solidFill>
-                  <a:srgbClr val="2A2340"/>
-                </a:solidFill>
-                <a:latin typeface="Inter" pitchFamily="34" charset="0"/>
-                <a:ea typeface="Inter" pitchFamily="34" charset="-122"/>
-                <a:cs typeface="Inter" pitchFamily="34" charset="-120"/>
-              </a:rPr>
-              <a:t> Cluster could not find the image</a:t>
-            </a:r>
-            <a:endParaRPr lang="en-US" sz="1600" dirty="0"/>
-          </a:p>
-        </p:txBody>
-      </p:sp>
-      <p:sp>
-        <p:nvSpPr>
-          <p:cNvPr id="18" name="Text 16"/>
-          <p:cNvSpPr/>
-          <p:nvPr/>
-        </p:nvSpPr>
-        <p:spPr>
-          <a:xfrm>
-            <a:off x="6400800" y="2504348"/>
-            <a:ext cx="4978400" cy="246327"/>
-          </a:xfrm>
-          <a:prstGeom prst="rect">
-            <a:avLst/>
-          </a:prstGeom>
-          <a:noFill/>
-          <a:ln/>
-        </p:spPr>
-        <p:txBody>
-          <a:bodyPr wrap="square" lIns="0" tIns="0" rIns="0" bIns="0" rtlCol="0" anchor="t">
-            <a:normAutofit/>
-          </a:bodyPr>
-          <a:lstStyle/>
-          <a:p>
-            <a:pPr algn="l" indent="0" marL="0">
-              <a:lnSpc>
-                <a:spcPts val="1740"/>
-              </a:lnSpc>
-              <a:buNone/>
-            </a:pPr>
-            <a:r>
-              <a:rPr lang="en-US" sz="1200" dirty="0">
-                <a:solidFill>
-                  <a:srgbClr val="5A5468"/>
-                </a:solidFill>
-                <a:latin typeface="Inter" pitchFamily="34" charset="0"/>
-                <a:ea typeface="Inter" pitchFamily="34" charset="-122"/>
-                <a:cs typeface="Inter" pitchFamily="34" charset="-120"/>
-              </a:rPr>
-              <a:t>notes-service:1.0.0 existed only on the laptop, not in any registry.</a:t>
-            </a:r>
-            <a:endParaRPr lang="en-US" sz="1200" dirty="0"/>
-          </a:p>
-        </p:txBody>
-      </p:sp>
-      <p:sp>
-        <p:nvSpPr>
-          <p:cNvPr id="19" name="Text 17"/>
-          <p:cNvSpPr/>
-          <p:nvPr/>
-        </p:nvSpPr>
-        <p:spPr>
-          <a:xfrm>
-            <a:off x="6400800" y="2801476"/>
-            <a:ext cx="4892294" cy="246327"/>
-          </a:xfrm>
-          <a:prstGeom prst="rect">
-            <a:avLst/>
-          </a:prstGeom>
-          <a:noFill/>
-          <a:ln/>
-        </p:spPr>
-        <p:txBody>
-          <a:bodyPr wrap="square" lIns="0" tIns="0" rIns="0" bIns="0" rtlCol="0" anchor="t">
-            <a:normAutofit/>
-          </a:bodyPr>
-          <a:lstStyle/>
-          <a:p>
-            <a:pPr algn="l" indent="0" marL="0">
-              <a:lnSpc>
-                <a:spcPts val="1740"/>
-              </a:lnSpc>
-              <a:buNone/>
-            </a:pPr>
-            <a:r>
-              <a:rPr lang="en-US" sz="1200" b="1" dirty="0">
-                <a:solidFill>
-                  <a:srgbClr val="4B3591"/>
-                </a:solidFill>
-                <a:latin typeface="Inter" pitchFamily="34" charset="0"/>
-                <a:ea typeface="Inter" pitchFamily="34" charset="-122"/>
-                <a:cs typeface="Inter" pitchFamily="34" charset="-120"/>
-              </a:rPr>
-              <a:t>Fix</a:t>
-            </a:r>
-            <a:r>
-              <a:rPr lang="en-US" sz="1200" dirty="0">
-                <a:solidFill>
-                  <a:srgbClr val="2A2340"/>
-                </a:solidFill>
-                <a:latin typeface="Inter" pitchFamily="34" charset="0"/>
-                <a:ea typeface="Inter" pitchFamily="34" charset="-122"/>
-                <a:cs typeface="Inter" pitchFamily="34" charset="-120"/>
-              </a:rPr>
-              <a:t> minikube image load, plus imagePullPolicy: IfNotPresent.</a:t>
-            </a:r>
-            <a:endParaRPr lang="en-US" sz="1200" dirty="0"/>
-          </a:p>
-        </p:txBody>
-      </p:sp>
-      <p:sp>
-        <p:nvSpPr>
-          <p:cNvPr id="20" name="Shape 18"/>
-          <p:cNvSpPr/>
-          <p:nvPr/>
-        </p:nvSpPr>
-        <p:spPr>
-          <a:xfrm>
-            <a:off x="812800" y="3598929"/>
             <a:ext cx="5207000" cy="1686322"/>
           </a:xfrm>
           <a:prstGeom prst="roundRect">
@@ -6675,13 +6440,13 @@
       </p:sp>
       <p:sp>
         <p:nvSpPr>
-          <p:cNvPr id="21" name="Text 19"/>
-          <p:cNvSpPr/>
-          <p:nvPr/>
-        </p:nvSpPr>
-        <p:spPr>
-          <a:xfrm>
-            <a:off x="1041400" y="3802129"/>
+          <p:cNvPr id="13" name="Text 11"/>
+          <p:cNvSpPr/>
+          <p:nvPr/>
+        </p:nvSpPr>
+        <p:spPr>
+          <a:xfrm>
+            <a:off x="1041400" y="2184335"/>
             <a:ext cx="4892294" cy="269214"/>
           </a:xfrm>
           <a:prstGeom prst="rect">
@@ -6711,7 +6476,7 @@
                 <a:ea typeface="Inter" pitchFamily="34" charset="-122"/>
                 <a:cs typeface="Inter" pitchFamily="34" charset="-120"/>
               </a:rPr>
-              <a:t>03</a:t>
+              <a:t>01</a:t>
             </a:r>
             <a:r>
               <a:rPr lang="en-US" sz="1600" b="1" dirty="0">
@@ -6722,7 +6487,7 @@
                 <a:ea typeface="Inter" pitchFamily="34" charset="-122"/>
                 <a:cs typeface="Inter" pitchFamily="34" charset="-120"/>
               </a:rPr>
-              <a:t> A rolling update you cannot see</a:t>
+              <a:t> apt stalled on a tzdata prompt</a:t>
             </a:r>
             <a:endParaRPr lang="en-US" sz="1600" dirty="0"/>
           </a:p>
@@ -6730,14 +6495,14 @@
       </p:sp>
       <p:sp>
         <p:nvSpPr>
-          <p:cNvPr id="22" name="Text 20"/>
-          <p:cNvSpPr/>
-          <p:nvPr/>
-        </p:nvSpPr>
-        <p:spPr>
-          <a:xfrm>
-            <a:off x="1041400" y="4122142"/>
-            <a:ext cx="4978400" cy="246327"/>
+          <p:cNvPr id="14" name="Text 12"/>
+          <p:cNvSpPr/>
+          <p:nvPr/>
+        </p:nvSpPr>
+        <p:spPr>
+          <a:xfrm>
+            <a:off x="1041400" y="2504348"/>
+            <a:ext cx="4892294" cy="467254"/>
           </a:xfrm>
           <a:prstGeom prst="rect">
             <a:avLst/>
@@ -6766,22 +6531,22 @@
                 <a:ea typeface="Inter" pitchFamily="34" charset="-122"/>
                 <a:cs typeface="Inter" pitchFamily="34" charset="-120"/>
               </a:rPr>
-              <a:t>A retagged image is identical, so v2.0.0 looked exactly like v1.0.0.</a:t>
-            </a:r>
-            <a:endParaRPr lang="en-US" sz="1200" dirty="0"/>
-          </a:p>
-        </p:txBody>
-      </p:sp>
-      <p:sp>
-        <p:nvSpPr>
-          <p:cNvPr id="23" name="Text 21"/>
-          <p:cNvSpPr/>
-          <p:nvPr/>
-        </p:nvSpPr>
-        <p:spPr>
-          <a:xfrm>
-            <a:off x="1041400" y="4419270"/>
-            <a:ext cx="4892294" cy="246327"/>
+              <a:t>Installing packages in the Ubuntu test container stopped to ask for a time zone.</a:t>
+            </a:r>
+            <a:endParaRPr lang="en-US" sz="1200" dirty="0"/>
+          </a:p>
+        </p:txBody>
+      </p:sp>
+      <p:sp>
+        <p:nvSpPr>
+          <p:cNvPr id="15" name="Text 13"/>
+          <p:cNvSpPr/>
+          <p:nvPr/>
+        </p:nvSpPr>
+        <p:spPr>
+          <a:xfrm>
+            <a:off x="1041400" y="3022402"/>
+            <a:ext cx="4892294" cy="467254"/>
           </a:xfrm>
           <a:prstGeom prst="rect">
             <a:avLst/>
@@ -6821,21 +6586,21 @@
                 <a:ea typeface="Inter" pitchFamily="34" charset="-122"/>
                 <a:cs typeface="Inter" pitchFamily="34" charset="-120"/>
               </a:rPr>
-              <a:t> Set APP_VERSION through env and expose it on /version.</a:t>
-            </a:r>
-            <a:endParaRPr lang="en-US" sz="1200" dirty="0"/>
-          </a:p>
-        </p:txBody>
-      </p:sp>
-      <p:sp>
-        <p:nvSpPr>
-          <p:cNvPr id="24" name="Shape 22"/>
-          <p:cNvSpPr/>
-          <p:nvPr/>
-        </p:nvSpPr>
-        <p:spPr>
-          <a:xfrm>
-            <a:off x="6172200" y="3598929"/>
+              <a:t> DEBIAN_FRONTEND=noninteractive, and the common role sets the time zone.</a:t>
+            </a:r>
+            <a:endParaRPr lang="en-US" sz="1200" dirty="0"/>
+          </a:p>
+        </p:txBody>
+      </p:sp>
+      <p:sp>
+        <p:nvSpPr>
+          <p:cNvPr id="16" name="Shape 14"/>
+          <p:cNvSpPr/>
+          <p:nvPr/>
+        </p:nvSpPr>
+        <p:spPr>
+          <a:xfrm>
+            <a:off x="6172200" y="1981135"/>
             <a:ext cx="5207000" cy="1686322"/>
           </a:xfrm>
           <a:prstGeom prst="roundRect">
@@ -6851,13 +6616,365 @@
       </p:sp>
       <p:sp>
         <p:nvSpPr>
+          <p:cNvPr id="17" name="Text 15"/>
+          <p:cNvSpPr/>
+          <p:nvPr/>
+        </p:nvSpPr>
+        <p:spPr>
+          <a:xfrm>
+            <a:off x="6400800" y="2184335"/>
+            <a:ext cx="4892294" cy="269214"/>
+          </a:xfrm>
+          <a:prstGeom prst="rect">
+            <a:avLst/>
+          </a:prstGeom>
+          <a:noFill/>
+          <a:ln/>
+        </p:spPr>
+        <p:txBody>
+          <a:bodyPr wrap="square" lIns="0" tIns="0" rIns="0" bIns="0" rtlCol="0" anchor="t">
+            <a:normAutofit/>
+          </a:bodyPr>
+          <a:lstStyle/>
+          <a:p>
+            <a:pPr algn="l" indent="0" marL="0">
+              <a:lnSpc>
+                <a:spcPts val="1920"/>
+              </a:lnSpc>
+              <a:buNone/>
+            </a:pPr>
+            <a:r>
+              <a:rPr lang="en-US" sz="1600" b="1" dirty="0">
+                <a:solidFill>
+                  <a:srgbClr val="7A4D39"/>
+                </a:solidFill>
+                <a:latin typeface="Inter" pitchFamily="34" charset="0"/>
+                <a:ea typeface="Inter" pitchFamily="34" charset="-122"/>
+                <a:cs typeface="Inter" pitchFamily="34" charset="-120"/>
+              </a:rPr>
+              <a:t>02</a:t>
+            </a:r>
+            <a:r>
+              <a:rPr lang="en-US" sz="1600" b="1" dirty="0">
+                <a:solidFill>
+                  <a:srgbClr val="2A2340"/>
+                </a:solidFill>
+                <a:latin typeface="Inter" pitchFamily="34" charset="0"/>
+                <a:ea typeface="Inter" pitchFamily="34" charset="-122"/>
+                <a:cs typeface="Inter" pitchFamily="34" charset="-120"/>
+              </a:rPr>
+              <a:t> pip blocked by PEP 668</a:t>
+            </a:r>
+            <a:endParaRPr lang="en-US" sz="1600" dirty="0"/>
+          </a:p>
+        </p:txBody>
+      </p:sp>
+      <p:sp>
+        <p:nvSpPr>
+          <p:cNvPr id="18" name="Text 16"/>
+          <p:cNvSpPr/>
+          <p:nvPr/>
+        </p:nvSpPr>
+        <p:spPr>
+          <a:xfrm>
+            <a:off x="6400800" y="2504348"/>
+            <a:ext cx="4892294" cy="467254"/>
+          </a:xfrm>
+          <a:prstGeom prst="rect">
+            <a:avLst/>
+          </a:prstGeom>
+          <a:noFill/>
+          <a:ln/>
+        </p:spPr>
+        <p:txBody>
+          <a:bodyPr wrap="square" lIns="0" tIns="0" rIns="0" bIns="0" rtlCol="0" anchor="t">
+            <a:normAutofit/>
+          </a:bodyPr>
+          <a:lstStyle/>
+          <a:p>
+            <a:pPr algn="l" indent="0" marL="0">
+              <a:lnSpc>
+                <a:spcPts val="1740"/>
+              </a:lnSpc>
+              <a:buNone/>
+            </a:pPr>
+            <a:r>
+              <a:rPr lang="en-US" sz="1200" dirty="0">
+                <a:solidFill>
+                  <a:srgbClr val="5A5468"/>
+                </a:solidFill>
+                <a:latin typeface="Inter" pitchFamily="34" charset="0"/>
+                <a:ea typeface="Inter" pitchFamily="34" charset="-122"/>
+                <a:cs typeface="Inter" pitchFamily="34" charset="-120"/>
+              </a:rPr>
+              <a:t>Ubuntu 24.04 refuses pip installs into system Python; the first fix was --break-system-packages.</a:t>
+            </a:r>
+            <a:endParaRPr lang="en-US" sz="1200" dirty="0"/>
+          </a:p>
+        </p:txBody>
+      </p:sp>
+      <p:sp>
+        <p:nvSpPr>
+          <p:cNvPr id="19" name="Text 17"/>
+          <p:cNvSpPr/>
+          <p:nvPr/>
+        </p:nvSpPr>
+        <p:spPr>
+          <a:xfrm>
+            <a:off x="6400800" y="3022402"/>
+            <a:ext cx="4978400" cy="246327"/>
+          </a:xfrm>
+          <a:prstGeom prst="rect">
+            <a:avLst/>
+          </a:prstGeom>
+          <a:noFill/>
+          <a:ln/>
+        </p:spPr>
+        <p:txBody>
+          <a:bodyPr wrap="square" lIns="0" tIns="0" rIns="0" bIns="0" rtlCol="0" anchor="t">
+            <a:normAutofit/>
+          </a:bodyPr>
+          <a:lstStyle/>
+          <a:p>
+            <a:pPr algn="l" indent="0" marL="0">
+              <a:lnSpc>
+                <a:spcPts val="1740"/>
+              </a:lnSpc>
+              <a:buNone/>
+            </a:pPr>
+            <a:r>
+              <a:rPr lang="en-US" sz="1200" b="1" dirty="0">
+                <a:solidFill>
+                  <a:srgbClr val="4B3591"/>
+                </a:solidFill>
+                <a:latin typeface="Inter" pitchFamily="34" charset="0"/>
+                <a:ea typeface="Inter" pitchFamily="34" charset="-122"/>
+                <a:cs typeface="Inter" pitchFamily="34" charset="-120"/>
+              </a:rPr>
+              <a:t>Fix</a:t>
+            </a:r>
+            <a:r>
+              <a:rPr lang="en-US" sz="1200" dirty="0">
+                <a:solidFill>
+                  <a:srgbClr val="2A2340"/>
+                </a:solidFill>
+                <a:latin typeface="Inter" pitchFamily="34" charset="0"/>
+                <a:ea typeface="Inter" pitchFamily="34" charset="-122"/>
+                <a:cs typeface="Inter" pitchFamily="34" charset="-120"/>
+              </a:rPr>
+              <a:t> Install dependencies into a virtualenv owned by the app user.</a:t>
+            </a:r>
+            <a:endParaRPr lang="en-US" sz="1200" dirty="0"/>
+          </a:p>
+        </p:txBody>
+      </p:sp>
+      <p:sp>
+        <p:nvSpPr>
+          <p:cNvPr id="20" name="Shape 18"/>
+          <p:cNvSpPr/>
+          <p:nvPr/>
+        </p:nvSpPr>
+        <p:spPr>
+          <a:xfrm>
+            <a:off x="812800" y="3819857"/>
+            <a:ext cx="5207000" cy="1686322"/>
+          </a:xfrm>
+          <a:prstGeom prst="roundRect">
+            <a:avLst>
+              <a:gd name="adj" fmla="val 7531"/>
+            </a:avLst>
+          </a:prstGeom>
+          <a:solidFill>
+            <a:srgbClr val="FFFFFF"/>
+          </a:solidFill>
+          <a:ln/>
+        </p:spPr>
+      </p:sp>
+      <p:sp>
+        <p:nvSpPr>
+          <p:cNvPr id="21" name="Text 19"/>
+          <p:cNvSpPr/>
+          <p:nvPr/>
+        </p:nvSpPr>
+        <p:spPr>
+          <a:xfrm>
+            <a:off x="1041400" y="4023057"/>
+            <a:ext cx="4892294" cy="269214"/>
+          </a:xfrm>
+          <a:prstGeom prst="rect">
+            <a:avLst/>
+          </a:prstGeom>
+          <a:noFill/>
+          <a:ln/>
+        </p:spPr>
+        <p:txBody>
+          <a:bodyPr wrap="square" lIns="0" tIns="0" rIns="0" bIns="0" rtlCol="0" anchor="t">
+            <a:normAutofit/>
+          </a:bodyPr>
+          <a:lstStyle/>
+          <a:p>
+            <a:pPr algn="l" indent="0" marL="0">
+              <a:lnSpc>
+                <a:spcPts val="1920"/>
+              </a:lnSpc>
+              <a:buNone/>
+            </a:pPr>
+            <a:r>
+              <a:rPr lang="en-US" sz="1600" b="1" dirty="0">
+                <a:solidFill>
+                  <a:srgbClr val="7A4D39"/>
+                </a:solidFill>
+                <a:latin typeface="Inter" pitchFamily="34" charset="0"/>
+                <a:ea typeface="Inter" pitchFamily="34" charset="-122"/>
+                <a:cs typeface="Inter" pitchFamily="34" charset="-120"/>
+              </a:rPr>
+              <a:t>03</a:t>
+            </a:r>
+            <a:r>
+              <a:rPr lang="en-US" sz="1600" b="1" dirty="0">
+                <a:solidFill>
+                  <a:srgbClr val="2A2340"/>
+                </a:solidFill>
+                <a:latin typeface="Inter" pitchFamily="34" charset="0"/>
+                <a:ea typeface="Inter" pitchFamily="34" charset="-122"/>
+                <a:cs typeface="Inter" pitchFamily="34" charset="-120"/>
+              </a:rPr>
+              <a:t> Metrics jumping up and down</a:t>
+            </a:r>
+            <a:endParaRPr lang="en-US" sz="1600" dirty="0"/>
+          </a:p>
+        </p:txBody>
+      </p:sp>
+      <p:sp>
+        <p:nvSpPr>
+          <p:cNvPr id="22" name="Text 20"/>
+          <p:cNvSpPr/>
+          <p:nvPr/>
+        </p:nvSpPr>
+        <p:spPr>
+          <a:xfrm>
+            <a:off x="1041400" y="4343070"/>
+            <a:ext cx="4892294" cy="467254"/>
+          </a:xfrm>
+          <a:prstGeom prst="rect">
+            <a:avLst/>
+          </a:prstGeom>
+          <a:noFill/>
+          <a:ln/>
+        </p:spPr>
+        <p:txBody>
+          <a:bodyPr wrap="square" lIns="0" tIns="0" rIns="0" bIns="0" rtlCol="0" anchor="t">
+            <a:normAutofit/>
+          </a:bodyPr>
+          <a:lstStyle/>
+          <a:p>
+            <a:pPr algn="l" indent="0" marL="0">
+              <a:lnSpc>
+                <a:spcPts val="1740"/>
+              </a:lnSpc>
+              <a:buNone/>
+            </a:pPr>
+            <a:r>
+              <a:rPr lang="en-US" sz="1200" dirty="0">
+                <a:solidFill>
+                  <a:srgbClr val="5A5468"/>
+                </a:solidFill>
+                <a:latin typeface="Inter" pitchFamily="34" charset="0"/>
+                <a:ea typeface="Inter" pitchFamily="34" charset="-122"/>
+                <a:cs typeface="Inter" pitchFamily="34" charset="-120"/>
+              </a:rPr>
+              <a:t>Two gunicorn workers each kept their own counters, so Prometheus totals were inconsistent.</a:t>
+            </a:r>
+            <a:endParaRPr lang="en-US" sz="1200" dirty="0"/>
+          </a:p>
+        </p:txBody>
+      </p:sp>
+      <p:sp>
+        <p:nvSpPr>
+          <p:cNvPr id="23" name="Text 21"/>
+          <p:cNvSpPr/>
+          <p:nvPr/>
+        </p:nvSpPr>
+        <p:spPr>
+          <a:xfrm>
+            <a:off x="1041400" y="4861123"/>
+            <a:ext cx="4892294" cy="467254"/>
+          </a:xfrm>
+          <a:prstGeom prst="rect">
+            <a:avLst/>
+          </a:prstGeom>
+          <a:noFill/>
+          <a:ln/>
+        </p:spPr>
+        <p:txBody>
+          <a:bodyPr wrap="square" lIns="0" tIns="0" rIns="0" bIns="0" rtlCol="0" anchor="t">
+            <a:normAutofit/>
+          </a:bodyPr>
+          <a:lstStyle/>
+          <a:p>
+            <a:pPr algn="l" indent="0" marL="0">
+              <a:lnSpc>
+                <a:spcPts val="1740"/>
+              </a:lnSpc>
+              <a:buNone/>
+            </a:pPr>
+            <a:r>
+              <a:rPr lang="en-US" sz="1200" b="1" dirty="0">
+                <a:solidFill>
+                  <a:srgbClr val="4B3591"/>
+                </a:solidFill>
+                <a:latin typeface="Inter" pitchFamily="34" charset="0"/>
+                <a:ea typeface="Inter" pitchFamily="34" charset="-122"/>
+                <a:cs typeface="Inter" pitchFamily="34" charset="-120"/>
+              </a:rPr>
+              <a:t>Fix</a:t>
+            </a:r>
+            <a:r>
+              <a:rPr lang="en-US" sz="1200" dirty="0">
+                <a:solidFill>
+                  <a:srgbClr val="2A2340"/>
+                </a:solidFill>
+                <a:latin typeface="Inter" pitchFamily="34" charset="0"/>
+                <a:ea typeface="Inter" pitchFamily="34" charset="-122"/>
+                <a:cs typeface="Inter" pitchFamily="34" charset="-120"/>
+              </a:rPr>
+              <a:t> One worker with four threads, so one process owns the metrics.</a:t>
+            </a:r>
+            <a:endParaRPr lang="en-US" sz="1200" dirty="0"/>
+          </a:p>
+        </p:txBody>
+      </p:sp>
+      <p:sp>
+        <p:nvSpPr>
+          <p:cNvPr id="24" name="Shape 22"/>
+          <p:cNvSpPr/>
+          <p:nvPr/>
+        </p:nvSpPr>
+        <p:spPr>
+          <a:xfrm>
+            <a:off x="6172200" y="3819857"/>
+            <a:ext cx="5207000" cy="1686322"/>
+          </a:xfrm>
+          <a:prstGeom prst="roundRect">
+            <a:avLst>
+              <a:gd name="adj" fmla="val 7531"/>
+            </a:avLst>
+          </a:prstGeom>
+          <a:solidFill>
+            <a:srgbClr val="FFFFFF"/>
+          </a:solidFill>
+          <a:ln/>
+        </p:spPr>
+      </p:sp>
+      <p:sp>
+        <p:nvSpPr>
           <p:cNvPr id="25" name="Text 23"/>
           <p:cNvSpPr/>
           <p:nvPr/>
         </p:nvSpPr>
         <p:spPr>
           <a:xfrm>
-            <a:off x="6400800" y="3802129"/>
+            <a:off x="6400800" y="4023057"/>
             <a:ext cx="4892294" cy="269214"/>
           </a:xfrm>
           <a:prstGeom prst="rect">
@@ -6898,7 +7015,7 @@
                 <a:ea typeface="Inter" pitchFamily="34" charset="-122"/>
                 <a:cs typeface="Inter" pitchFamily="34" charset="-120"/>
               </a:rPr>
-              <a:t> An empty error-rate panel</a:t>
+              <a:t> Pods stuck in ErrImagePull</a:t>
             </a:r>
             <a:endParaRPr lang="en-US" sz="1600" dirty="0"/>
           </a:p>
@@ -6912,8 +7029,8 @@
         </p:nvSpPr>
         <p:spPr>
           <a:xfrm>
-            <a:off x="6400800" y="4122142"/>
-            <a:ext cx="4892294" cy="467254"/>
+            <a:off x="6400800" y="4343070"/>
+            <a:ext cx="4892294" cy="246327"/>
           </a:xfrm>
           <a:prstGeom prst="rect">
             <a:avLst/>
@@ -6942,7 +7059,7 @@
                 <a:ea typeface="Inter" pitchFamily="34" charset="-122"/>
                 <a:cs typeface="Inter" pitchFamily="34" charset="-120"/>
               </a:rPr>
-              <a:t>A healthy app returns no 5xx responses, so the Grafana panel stayed blank.</a:t>
+              <a:t>The cluster could not see images built on the host machine.</a:t>
             </a:r>
             <a:endParaRPr lang="en-US" sz="1200" dirty="0"/>
           </a:p>
@@ -6997,7 +7114,7 @@
                 <a:ea typeface="Inter" pitchFamily="34" charset="-122"/>
                 <a:cs typeface="Inter" pitchFamily="34" charset="-120"/>
               </a:rPr>
-              <a:t> A deliberate /boom endpoint and a curl loop to generate traffic.</a:t>
+              <a:t> minikube image load / kind load, plus imagePullPolicy: IfNotPresent.</a:t>
             </a:r>
             <a:endParaRPr lang="en-US" sz="1200" dirty="0"/>
           </a:p>
@@ -7012,7 +7129,7 @@
         <p:spPr>
           <a:xfrm>
             <a:off x="812800" y="6238280"/>
-            <a:ext cx="962978" cy="238720"/>
+            <a:ext cx="7688025" cy="238720"/>
           </a:xfrm>
           <a:prstGeom prst="rect">
             <a:avLst/>
@@ -7041,7 +7158,7 @@
                 <a:ea typeface="Inter" pitchFamily="34" charset="-122"/>
                 <a:cs typeface="Inter" pitchFamily="34" charset="-120"/>
               </a:rPr>
-              <a:t>Challenges</a:t>
+              <a:t>Also solved: no systemd in test containers · Windows line endings · readiness vs liveness</a:t>
             </a:r>
             <a:endParaRPr lang="en-US" sz="1200" dirty="0"/>
           </a:p>
@@ -7555,7 +7672,7 @@
         <p:spPr>
           <a:xfrm>
             <a:off x="990600" y="1981135"/>
-            <a:ext cx="4923089" cy="269214"/>
+            <a:ext cx="5807964" cy="269214"/>
           </a:xfrm>
           <a:prstGeom prst="rect">
             <a:avLst/>
@@ -7584,7 +7701,7 @@
                 <a:ea typeface="Inter" pitchFamily="34" charset="-122"/>
                 <a:cs typeface="Inter" pitchFamily="34" charset="-120"/>
               </a:rPr>
-              <a:t>Idempotency is the real test</a:t>
+              <a:t>Build once, ship that artefact</a:t>
             </a:r>
             <a:endParaRPr lang="en-US" sz="1600" dirty="0"/>
           </a:p>
@@ -7599,7 +7716,7 @@
         <p:spPr>
           <a:xfrm>
             <a:off x="990600" y="2263049"/>
-            <a:ext cx="5638800" cy="246327"/>
+            <a:ext cx="5807964" cy="246327"/>
           </a:xfrm>
           <a:prstGeom prst="rect">
             <a:avLst/>
@@ -7628,7 +7745,7 @@
                 <a:ea typeface="Inter" pitchFamily="34" charset="-122"/>
                 <a:cs typeface="Inter" pitchFamily="34" charset="-120"/>
               </a:rPr>
-              <a:t>A second Ansible run with changed=0 is what makes re-runs safe.</a:t>
+              <a:t>The image we test, scan and deploy is the exact one pushed to GHCR.</a:t>
             </a:r>
             <a:endParaRPr lang="en-US" sz="1200" dirty="0"/>
           </a:p>
@@ -7643,7 +7760,7 @@
         <p:spPr>
           <a:xfrm>
             <a:off x="825500" y="2623676"/>
-            <a:ext cx="0" cy="502841"/>
+            <a:ext cx="0" cy="723768"/>
           </a:xfrm>
           <a:prstGeom prst="line">
             <a:avLst/>
@@ -7666,7 +7783,7 @@
         <p:spPr>
           <a:xfrm>
             <a:off x="990600" y="2623676"/>
-            <a:ext cx="5578297" cy="269214"/>
+            <a:ext cx="5807964" cy="269214"/>
           </a:xfrm>
           <a:prstGeom prst="rect">
             <a:avLst/>
@@ -7695,7 +7812,7 @@
                 <a:ea typeface="Inter" pitchFamily="34" charset="-122"/>
                 <a:cs typeface="Inter" pitchFamily="34" charset="-120"/>
               </a:rPr>
-              <a:t>Probes make rollouts boring</a:t>
+              <a:t>Idempotency is testable</a:t>
             </a:r>
             <a:endParaRPr lang="en-US" sz="1600" dirty="0"/>
           </a:p>
@@ -7710,7 +7827,7 @@
         <p:spPr>
           <a:xfrm>
             <a:off x="990600" y="2905590"/>
-            <a:ext cx="5638800" cy="246327"/>
+            <a:ext cx="5807964" cy="467254"/>
           </a:xfrm>
           <a:prstGeom prst="rect">
             <a:avLst/>
@@ -7739,7 +7856,7 @@
                 <a:ea typeface="Inter" pitchFamily="34" charset="-122"/>
                 <a:cs typeface="Inter" pitchFamily="34" charset="-120"/>
               </a:rPr>
-              <a:t>Readiness checks plus maxUnavailable 0 kept full capacity during updates.</a:t>
+              <a:t>Running the playbook twice and checking changed=0 exposes non-declarative tasks.</a:t>
             </a:r>
             <a:endParaRPr lang="en-US" sz="1200" dirty="0"/>
           </a:p>
@@ -7753,7 +7870,7 @@
         </p:nvSpPr>
         <p:spPr>
           <a:xfrm>
-            <a:off x="825500" y="3266216"/>
+            <a:off x="825500" y="3487142"/>
             <a:ext cx="0" cy="502841"/>
           </a:xfrm>
           <a:prstGeom prst="line">
@@ -7776,8 +7893,8 @@
         </p:nvSpPr>
         <p:spPr>
           <a:xfrm>
-            <a:off x="990600" y="3266216"/>
-            <a:ext cx="5293172" cy="269214"/>
+            <a:off x="990600" y="3487142"/>
+            <a:ext cx="5807964" cy="269214"/>
           </a:xfrm>
           <a:prstGeom prst="rect">
             <a:avLst/>
@@ -7806,7 +7923,7 @@
                 <a:ea typeface="Inter" pitchFamily="34" charset="-122"/>
                 <a:cs typeface="Inter" pitchFamily="34" charset="-120"/>
               </a:rPr>
-              <a:t>Instrument before dashboards</a:t>
+              <a:t>Rollback is a design choice</a:t>
             </a:r>
             <a:endParaRPr lang="en-US" sz="1600" dirty="0"/>
           </a:p>
@@ -7820,8 +7937,8 @@
         </p:nvSpPr>
         <p:spPr>
           <a:xfrm>
-            <a:off x="990600" y="3548131"/>
-            <a:ext cx="5638800" cy="246327"/>
+            <a:off x="990600" y="3769057"/>
+            <a:ext cx="5807964" cy="246327"/>
           </a:xfrm>
           <a:prstGeom prst="rect">
             <a:avLst/>
@@ -7850,7 +7967,7 @@
                 <a:ea typeface="Inter" pitchFamily="34" charset="-122"/>
                 <a:cs typeface="Inter" pitchFamily="34" charset="-120"/>
               </a:rPr>
-              <a:t>Labelled counters and a latency histogram made each panel one query.</a:t>
+              <a:t>Probes, maxUnavailable 0 and a progress deadline stop a bad release first.</a:t>
             </a:r>
             <a:endParaRPr lang="en-US" sz="1200" dirty="0"/>
           </a:p>
@@ -7864,8 +7981,8 @@
         </p:nvSpPr>
         <p:spPr>
           <a:xfrm>
-            <a:off x="825500" y="3908757"/>
-            <a:ext cx="0" cy="502841"/>
+            <a:off x="825500" y="4129683"/>
+            <a:ext cx="0" cy="723768"/>
           </a:xfrm>
           <a:prstGeom prst="line">
             <a:avLst/>
@@ -7887,8 +8004,8 @@
         </p:nvSpPr>
         <p:spPr>
           <a:xfrm>
-            <a:off x="990600" y="3908757"/>
-            <a:ext cx="4604240" cy="269214"/>
+            <a:off x="990600" y="4129683"/>
+            <a:ext cx="5807964" cy="269214"/>
           </a:xfrm>
           <a:prstGeom prst="rect">
             <a:avLst/>
@@ -7917,7 +8034,7 @@
                 <a:ea typeface="Inter" pitchFamily="34" charset="-122"/>
                 <a:cs typeface="Inter" pitchFamily="34" charset="-120"/>
               </a:rPr>
-              <a:t>Test the artefact, not just the code</a:t>
+              <a:t>Everything as code, security early</a:t>
             </a:r>
             <a:endParaRPr lang="en-US" sz="1600" dirty="0"/>
           </a:p>
@@ -7931,8 +8048,8 @@
         </p:nvSpPr>
         <p:spPr>
           <a:xfrm>
-            <a:off x="990600" y="4190671"/>
-            <a:ext cx="5364163" cy="246327"/>
+            <a:off x="990600" y="4411597"/>
+            <a:ext cx="5807964" cy="467254"/>
           </a:xfrm>
           <a:prstGeom prst="rect">
             <a:avLst/>
@@ -7961,7 +8078,7 @@
                 <a:ea typeface="Inter" pitchFamily="34" charset="-122"/>
                 <a:cs typeface="Inter" pitchFamily="34" charset="-120"/>
               </a:rPr>
-              <a:t>Smoke-testing the built container catches what pytest cannot.</a:t>
+              <a:t>Pipeline, config, cluster, dashboards and alerts live in the repo; linting and scans run on every push.</a:t>
             </a:r>
             <a:endParaRPr lang="en-US" sz="1200" dirty="0"/>
           </a:p>
